--- a/docs/FinAgentPro路演PPT.pptx
+++ b/docs/FinAgentPro路演PPT.pptx
@@ -3652,7 +3652,6 @@
           <a:ln>
             <a:noFill/>
           </a:ln>
-          <a:effectLst/>
         </p:spPr>
         <p:style>
           <a:lnRef idx="1">
@@ -3696,7 +3695,6 @@
           <a:ln>
             <a:noFill/>
           </a:ln>
-          <a:effectLst/>
         </p:spPr>
         <p:style>
           <a:lnRef idx="1">
@@ -3747,7 +3745,7 @@
                 <a:solidFill>
                   <a:srgbClr val="FFFFFF"/>
                 </a:solidFill>
-                <a:latin typeface="Microsoft YaHei"/>
+                <a:latin typeface="微软雅黑"/>
               </a:defRPr>
             </a:pPr>
             <a:r>
@@ -3779,29 +3777,76 @@
           <a:lstStyle/>
           <a:p>
             <a:pPr algn="l">
-              <a:defRPr sz="1300" b="0">
+              <a:defRPr sz="1400" b="0">
                 <a:solidFill>
                   <a:srgbClr val="94A3B8"/>
                 </a:solidFill>
-                <a:latin typeface="Microsoft YaHei"/>
-              </a:defRPr>
-            </a:pPr>
-            <a:r>
-              <a:t>发展路线图与融资需求</a:t>
-            </a:r>
-          </a:p>
-        </p:txBody>
-      </p:sp>
-      <p:sp>
-        <p:nvSpPr>
-          <p:cNvPr id="6" name="Rectangle 5"/>
+                <a:latin typeface="微软雅黑"/>
+              </a:defRPr>
+            </a:pPr>
+            <a:r>
+              <a:t>一人团队 · 全栈智能 · 以一当十</a:t>
+            </a:r>
+          </a:p>
+        </p:txBody>
+      </p:sp>
+      <p:sp>
+        <p:nvSpPr>
+          <p:cNvPr id="6" name="Rounded Rectangle 5"/>
           <p:cNvSpPr/>
           <p:nvPr/>
         </p:nvSpPr>
         <p:spPr>
           <a:xfrm>
-            <a:off x="1371600" y="1920240"/>
-            <a:ext cx="9144000" cy="36576"/>
+            <a:off x="457200" y="1463040"/>
+            <a:ext cx="3200400" cy="4206240"/>
+          </a:xfrm>
+          <a:prstGeom prst="roundRect">
+            <a:avLst>
+              <a:gd name="adj" fmla="val 5000"/>
+            </a:avLst>
+          </a:prstGeom>
+          <a:solidFill>
+            <a:srgbClr val="1E293B"/>
+          </a:solidFill>
+          <a:ln w="19050">
+            <a:solidFill>
+              <a:srgbClr val="334455"/>
+            </a:solidFill>
+          </a:ln>
+        </p:spPr>
+        <p:style>
+          <a:lnRef idx="1">
+            <a:schemeClr val="accent1"/>
+          </a:lnRef>
+          <a:fillRef idx="3">
+            <a:schemeClr val="accent1"/>
+          </a:fillRef>
+          <a:effectRef idx="2">
+            <a:schemeClr val="accent1"/>
+          </a:effectRef>
+          <a:fontRef idx="minor">
+            <a:schemeClr val="lt1"/>
+          </a:fontRef>
+        </p:style>
+        <p:txBody>
+          <a:bodyPr rtlCol="0" anchor="ctr"/>
+          <a:lstStyle/>
+          <a:p>
+            <a:pPr algn="ctr"/>
+          </a:p>
+        </p:txBody>
+      </p:sp>
+      <p:sp>
+        <p:nvSpPr>
+          <p:cNvPr id="7" name="Rectangle 6"/>
+          <p:cNvSpPr/>
+          <p:nvPr/>
+        </p:nvSpPr>
+        <p:spPr>
+          <a:xfrm>
+            <a:off x="457200" y="1463040"/>
+            <a:ext cx="3200400" cy="45720"/>
           </a:xfrm>
           <a:prstGeom prst="rect">
             <a:avLst/>
@@ -3812,7 +3857,6 @@
           <a:ln>
             <a:noFill/>
           </a:ln>
-          <a:effectLst/>
         </p:spPr>
         <p:style>
           <a:lnRef idx="1">
@@ -3838,16 +3882,545 @@
       </p:sp>
       <p:sp>
         <p:nvSpPr>
-          <p:cNvPr id="7" name="Oval 6"/>
+          <p:cNvPr id="8" name="TextBox 7"/>
+          <p:cNvSpPr txBox="1"/>
+          <p:nvPr/>
+        </p:nvSpPr>
+        <p:spPr>
+          <a:xfrm>
+            <a:off x="640080" y="1645920"/>
+            <a:ext cx="2834640" cy="320040"/>
+          </a:xfrm>
+          <a:prstGeom prst="rect">
+            <a:avLst/>
+          </a:prstGeom>
+          <a:noFill/>
+        </p:spPr>
+        <p:txBody>
+          <a:bodyPr wrap="square">
+            <a:spAutoFit/>
+          </a:bodyPr>
+          <a:lstStyle/>
+          <a:p>
+            <a:pPr algn="l">
+              <a:defRPr sz="1100" b="0">
+                <a:solidFill>
+                  <a:srgbClr val="94A3B8"/>
+                </a:solidFill>
+                <a:latin typeface="微软雅黑"/>
+              </a:defRPr>
+            </a:pPr>
+            <a:r>
+              <a:t>🛡️ 团队名称</a:t>
+            </a:r>
+          </a:p>
+        </p:txBody>
+      </p:sp>
+      <p:sp>
+        <p:nvSpPr>
+          <p:cNvPr id="9" name="TextBox 8"/>
+          <p:cNvSpPr txBox="1"/>
+          <p:nvPr/>
+        </p:nvSpPr>
+        <p:spPr>
+          <a:xfrm>
+            <a:off x="640080" y="1920240"/>
+            <a:ext cx="2834640" cy="411480"/>
+          </a:xfrm>
+          <a:prstGeom prst="rect">
+            <a:avLst/>
+          </a:prstGeom>
+          <a:noFill/>
+        </p:spPr>
+        <p:txBody>
+          <a:bodyPr wrap="square">
+            <a:spAutoFit/>
+          </a:bodyPr>
+          <a:lstStyle/>
+          <a:p>
+            <a:pPr algn="l">
+              <a:defRPr sz="2200" b="1">
+                <a:solidFill>
+                  <a:srgbClr val="3B82F6"/>
+                </a:solidFill>
+                <a:latin typeface="微软雅黑"/>
+              </a:defRPr>
+            </a:pPr>
+            <a:r>
+              <a:t>智融先锋</a:t>
+            </a:r>
+          </a:p>
+        </p:txBody>
+      </p:sp>
+      <p:sp>
+        <p:nvSpPr>
+          <p:cNvPr id="10" name="Rectangle 9"/>
           <p:cNvSpPr/>
           <p:nvPr/>
         </p:nvSpPr>
         <p:spPr>
           <a:xfrm>
-            <a:off x="2103120" y="1783080"/>
-            <a:ext cx="320040" cy="320040"/>
-          </a:xfrm>
-          <a:prstGeom prst="ellipse">
+            <a:off x="640080" y="2377440"/>
+            <a:ext cx="2743200" cy="13716"/>
+          </a:xfrm>
+          <a:prstGeom prst="rect">
+            <a:avLst/>
+          </a:prstGeom>
+          <a:solidFill>
+            <a:srgbClr val="334455"/>
+          </a:solidFill>
+          <a:ln>
+            <a:noFill/>
+          </a:ln>
+        </p:spPr>
+        <p:style>
+          <a:lnRef idx="1">
+            <a:schemeClr val="accent1"/>
+          </a:lnRef>
+          <a:fillRef idx="3">
+            <a:schemeClr val="accent1"/>
+          </a:fillRef>
+          <a:effectRef idx="2">
+            <a:schemeClr val="accent1"/>
+          </a:effectRef>
+          <a:fontRef idx="minor">
+            <a:schemeClr val="lt1"/>
+          </a:fontRef>
+        </p:style>
+        <p:txBody>
+          <a:bodyPr rtlCol="0" anchor="ctr"/>
+          <a:lstStyle/>
+          <a:p>
+            <a:pPr algn="ctr"/>
+          </a:p>
+        </p:txBody>
+      </p:sp>
+      <p:sp>
+        <p:nvSpPr>
+          <p:cNvPr id="11" name="TextBox 10"/>
+          <p:cNvSpPr txBox="1"/>
+          <p:nvPr/>
+        </p:nvSpPr>
+        <p:spPr>
+          <a:xfrm>
+            <a:off x="640080" y="2514600"/>
+            <a:ext cx="2834640" cy="274320"/>
+          </a:xfrm>
+          <a:prstGeom prst="rect">
+            <a:avLst/>
+          </a:prstGeom>
+          <a:noFill/>
+        </p:spPr>
+        <p:txBody>
+          <a:bodyPr wrap="square">
+            <a:spAutoFit/>
+          </a:bodyPr>
+          <a:lstStyle/>
+          <a:p>
+            <a:pPr algn="l">
+              <a:defRPr sz="1100" b="0">
+                <a:solidFill>
+                  <a:srgbClr val="94A3B8"/>
+                </a:solidFill>
+                <a:latin typeface="微软雅黑"/>
+              </a:defRPr>
+            </a:pPr>
+            <a:r>
+              <a:t>👤 创始人</a:t>
+            </a:r>
+          </a:p>
+        </p:txBody>
+      </p:sp>
+      <p:sp>
+        <p:nvSpPr>
+          <p:cNvPr id="12" name="TextBox 11"/>
+          <p:cNvSpPr txBox="1"/>
+          <p:nvPr/>
+        </p:nvSpPr>
+        <p:spPr>
+          <a:xfrm>
+            <a:off x="640080" y="2743200"/>
+            <a:ext cx="2834640" cy="365760"/>
+          </a:xfrm>
+          <a:prstGeom prst="rect">
+            <a:avLst/>
+          </a:prstGeom>
+          <a:noFill/>
+        </p:spPr>
+        <p:txBody>
+          <a:bodyPr wrap="square">
+            <a:spAutoFit/>
+          </a:bodyPr>
+          <a:lstStyle/>
+          <a:p>
+            <a:pPr algn="l">
+              <a:defRPr sz="2000" b="1">
+                <a:solidFill>
+                  <a:srgbClr val="FFFFFF"/>
+                </a:solidFill>
+                <a:latin typeface="微软雅黑"/>
+              </a:defRPr>
+            </a:pPr>
+            <a:r>
+              <a:t>冯亦根</a:t>
+            </a:r>
+          </a:p>
+        </p:txBody>
+      </p:sp>
+      <p:sp>
+        <p:nvSpPr>
+          <p:cNvPr id="13" name="TextBox 12"/>
+          <p:cNvSpPr txBox="1"/>
+          <p:nvPr/>
+        </p:nvSpPr>
+        <p:spPr>
+          <a:xfrm>
+            <a:off x="640080" y="3200400"/>
+            <a:ext cx="2834640" cy="274320"/>
+          </a:xfrm>
+          <a:prstGeom prst="rect">
+            <a:avLst/>
+          </a:prstGeom>
+          <a:noFill/>
+        </p:spPr>
+        <p:txBody>
+          <a:bodyPr wrap="square">
+            <a:spAutoFit/>
+          </a:bodyPr>
+          <a:lstStyle/>
+          <a:p>
+            <a:pPr algn="l">
+              <a:defRPr sz="1100" b="0">
+                <a:solidFill>
+                  <a:srgbClr val="94A3B8"/>
+                </a:solidFill>
+                <a:latin typeface="微软雅黑"/>
+              </a:defRPr>
+            </a:pPr>
+            <a:r>
+              <a:t>🎓 浙江大学</a:t>
+            </a:r>
+          </a:p>
+        </p:txBody>
+      </p:sp>
+      <p:sp>
+        <p:nvSpPr>
+          <p:cNvPr id="14" name="TextBox 13"/>
+          <p:cNvSpPr txBox="1"/>
+          <p:nvPr/>
+        </p:nvSpPr>
+        <p:spPr>
+          <a:xfrm>
+            <a:off x="640080" y="3429000"/>
+            <a:ext cx="2834640" cy="320040"/>
+          </a:xfrm>
+          <a:prstGeom prst="rect">
+            <a:avLst/>
+          </a:prstGeom>
+          <a:noFill/>
+        </p:spPr>
+        <p:txBody>
+          <a:bodyPr wrap="square">
+            <a:spAutoFit/>
+          </a:bodyPr>
+          <a:lstStyle/>
+          <a:p>
+            <a:pPr algn="l">
+              <a:defRPr sz="1400" b="0">
+                <a:solidFill>
+                  <a:srgbClr val="FFFFFF"/>
+                </a:solidFill>
+                <a:latin typeface="微软雅黑"/>
+              </a:defRPr>
+            </a:pPr>
+            <a:r>
+              <a:t>计算机通信工程</a:t>
+            </a:r>
+          </a:p>
+        </p:txBody>
+      </p:sp>
+      <p:sp>
+        <p:nvSpPr>
+          <p:cNvPr id="15" name="Rectangle 14"/>
+          <p:cNvSpPr/>
+          <p:nvPr/>
+        </p:nvSpPr>
+        <p:spPr>
+          <a:xfrm>
+            <a:off x="640080" y="3840480"/>
+            <a:ext cx="2743200" cy="13716"/>
+          </a:xfrm>
+          <a:prstGeom prst="rect">
+            <a:avLst/>
+          </a:prstGeom>
+          <a:solidFill>
+            <a:srgbClr val="334455"/>
+          </a:solidFill>
+          <a:ln>
+            <a:noFill/>
+          </a:ln>
+        </p:spPr>
+        <p:style>
+          <a:lnRef idx="1">
+            <a:schemeClr val="accent1"/>
+          </a:lnRef>
+          <a:fillRef idx="3">
+            <a:schemeClr val="accent1"/>
+          </a:fillRef>
+          <a:effectRef idx="2">
+            <a:schemeClr val="accent1"/>
+          </a:effectRef>
+          <a:fontRef idx="minor">
+            <a:schemeClr val="lt1"/>
+          </a:fontRef>
+        </p:style>
+        <p:txBody>
+          <a:bodyPr rtlCol="0" anchor="ctr"/>
+          <a:lstStyle/>
+          <a:p>
+            <a:pPr algn="ctr"/>
+          </a:p>
+        </p:txBody>
+      </p:sp>
+      <p:sp>
+        <p:nvSpPr>
+          <p:cNvPr id="16" name="TextBox 15"/>
+          <p:cNvSpPr txBox="1"/>
+          <p:nvPr/>
+        </p:nvSpPr>
+        <p:spPr>
+          <a:xfrm>
+            <a:off x="640080" y="3977639"/>
+            <a:ext cx="2834640" cy="274320"/>
+          </a:xfrm>
+          <a:prstGeom prst="rect">
+            <a:avLst/>
+          </a:prstGeom>
+          <a:noFill/>
+        </p:spPr>
+        <p:txBody>
+          <a:bodyPr wrap="square">
+            <a:spAutoFit/>
+          </a:bodyPr>
+          <a:lstStyle/>
+          <a:p>
+            <a:pPr algn="l">
+              <a:defRPr sz="1100" b="0">
+                <a:solidFill>
+                  <a:srgbClr val="94A3B8"/>
+                </a:solidFill>
+                <a:latin typeface="微软雅黑"/>
+              </a:defRPr>
+            </a:pPr>
+            <a:r>
+              <a:t>⚡ 团队模式</a:t>
+            </a:r>
+          </a:p>
+        </p:txBody>
+      </p:sp>
+      <p:sp>
+        <p:nvSpPr>
+          <p:cNvPr id="17" name="Rounded Rectangle 16"/>
+          <p:cNvSpPr/>
+          <p:nvPr/>
+        </p:nvSpPr>
+        <p:spPr>
+          <a:xfrm>
+            <a:off x="640080" y="4251960"/>
+            <a:ext cx="1645920" cy="411480"/>
+          </a:xfrm>
+          <a:prstGeom prst="roundRect">
+            <a:avLst>
+              <a:gd name="adj" fmla="val 5000"/>
+            </a:avLst>
+          </a:prstGeom>
+          <a:solidFill>
+            <a:srgbClr val="1E3A5F"/>
+          </a:solidFill>
+          <a:ln w="19050">
+            <a:solidFill>
+              <a:srgbClr val="3B82F6"/>
+            </a:solidFill>
+          </a:ln>
+        </p:spPr>
+        <p:style>
+          <a:lnRef idx="1">
+            <a:schemeClr val="accent1"/>
+          </a:lnRef>
+          <a:fillRef idx="3">
+            <a:schemeClr val="accent1"/>
+          </a:fillRef>
+          <a:effectRef idx="2">
+            <a:schemeClr val="accent1"/>
+          </a:effectRef>
+          <a:fontRef idx="minor">
+            <a:schemeClr val="lt1"/>
+          </a:fontRef>
+        </p:style>
+        <p:txBody>
+          <a:bodyPr rtlCol="0" anchor="ctr"/>
+          <a:lstStyle/>
+          <a:p>
+            <a:pPr algn="ctr"/>
+          </a:p>
+        </p:txBody>
+      </p:sp>
+      <p:sp>
+        <p:nvSpPr>
+          <p:cNvPr id="18" name="TextBox 17"/>
+          <p:cNvSpPr txBox="1"/>
+          <p:nvPr/>
+        </p:nvSpPr>
+        <p:spPr>
+          <a:xfrm>
+            <a:off x="640080" y="4251960"/>
+            <a:ext cx="1645920" cy="411480"/>
+          </a:xfrm>
+          <a:prstGeom prst="rect">
+            <a:avLst/>
+          </a:prstGeom>
+          <a:noFill/>
+        </p:spPr>
+        <p:txBody>
+          <a:bodyPr wrap="square">
+            <a:spAutoFit/>
+          </a:bodyPr>
+          <a:lstStyle/>
+          <a:p>
+            <a:pPr algn="ctr">
+              <a:defRPr sz="1300" b="1">
+                <a:solidFill>
+                  <a:srgbClr val="3B82F6"/>
+                </a:solidFill>
+                <a:latin typeface="微软雅黑"/>
+              </a:defRPr>
+            </a:pPr>
+            <a:r>
+              <a:t>OPC 一人团队</a:t>
+            </a:r>
+          </a:p>
+        </p:txBody>
+      </p:sp>
+      <p:sp>
+        <p:nvSpPr>
+          <p:cNvPr id="19" name="TextBox 18"/>
+          <p:cNvSpPr txBox="1"/>
+          <p:nvPr/>
+        </p:nvSpPr>
+        <p:spPr>
+          <a:xfrm>
+            <a:off x="640080" y="4800600"/>
+            <a:ext cx="2834640" cy="274320"/>
+          </a:xfrm>
+          <a:prstGeom prst="rect">
+            <a:avLst/>
+          </a:prstGeom>
+          <a:noFill/>
+        </p:spPr>
+        <p:txBody>
+          <a:bodyPr wrap="square">
+            <a:spAutoFit/>
+          </a:bodyPr>
+          <a:lstStyle/>
+          <a:p>
+            <a:pPr algn="l">
+              <a:defRPr sz="1100" b="0">
+                <a:solidFill>
+                  <a:srgbClr val="94A3B8"/>
+                </a:solidFill>
+                <a:latin typeface="微软雅黑"/>
+              </a:defRPr>
+            </a:pPr>
+            <a:r>
+              <a:t>全栈能力</a:t>
+            </a:r>
+          </a:p>
+        </p:txBody>
+      </p:sp>
+      <p:sp>
+        <p:nvSpPr>
+          <p:cNvPr id="20" name="TextBox 19"/>
+          <p:cNvSpPr txBox="1"/>
+          <p:nvPr/>
+        </p:nvSpPr>
+        <p:spPr>
+          <a:xfrm>
+            <a:off x="640080" y="5029200"/>
+            <a:ext cx="2834640" cy="502920"/>
+          </a:xfrm>
+          <a:prstGeom prst="rect">
+            <a:avLst/>
+          </a:prstGeom>
+          <a:noFill/>
+        </p:spPr>
+        <p:txBody>
+          <a:bodyPr wrap="square">
+            <a:spAutoFit/>
+          </a:bodyPr>
+          <a:lstStyle/>
+          <a:p>
+            <a:pPr algn="l">
+              <a:defRPr sz="1200" b="0">
+                <a:solidFill>
+                  <a:srgbClr val="FFFFFF"/>
+                </a:solidFill>
+                <a:latin typeface="微软雅黑"/>
+              </a:defRPr>
+            </a:pPr>
+            <a:r>
+              <a:t>架构 · 开发 · AI · 产品 · 运营</a:t>
+            </a:r>
+          </a:p>
+        </p:txBody>
+      </p:sp>
+      <p:sp>
+        <p:nvSpPr>
+          <p:cNvPr id="21" name="TextBox 20"/>
+          <p:cNvSpPr txBox="1"/>
+          <p:nvPr/>
+        </p:nvSpPr>
+        <p:spPr>
+          <a:xfrm>
+            <a:off x="3931920" y="1463040"/>
+            <a:ext cx="4389120" cy="365760"/>
+          </a:xfrm>
+          <a:prstGeom prst="rect">
+            <a:avLst/>
+          </a:prstGeom>
+          <a:noFill/>
+        </p:spPr>
+        <p:txBody>
+          <a:bodyPr wrap="square">
+            <a:spAutoFit/>
+          </a:bodyPr>
+          <a:lstStyle/>
+          <a:p>
+            <a:pPr algn="l">
+              <a:defRPr sz="1600" b="1">
+                <a:solidFill>
+                  <a:srgbClr val="FFFFFF"/>
+                </a:solidFill>
+                <a:latin typeface="微软雅黑"/>
+              </a:defRPr>
+            </a:pPr>
+            <a:r>
+              <a:t>🚀 发展路线图</a:t>
+            </a:r>
+          </a:p>
+        </p:txBody>
+      </p:sp>
+      <p:sp>
+        <p:nvSpPr>
+          <p:cNvPr id="22" name="Rectangle 21"/>
+          <p:cNvSpPr/>
+          <p:nvPr/>
+        </p:nvSpPr>
+        <p:spPr>
+          <a:xfrm>
+            <a:off x="4206240" y="2148840"/>
+            <a:ext cx="3840480" cy="27432"/>
+          </a:xfrm>
+          <a:prstGeom prst="rect">
             <a:avLst/>
           </a:prstGeom>
           <a:solidFill>
@@ -3856,7 +4429,6 @@
           <a:ln>
             <a:noFill/>
           </a:ln>
-          <a:effectLst/>
         </p:spPr>
         <p:style>
           <a:lnRef idx="1">
@@ -3882,98 +4454,16 @@
       </p:sp>
       <p:sp>
         <p:nvSpPr>
-          <p:cNvPr id="8" name="TextBox 7"/>
-          <p:cNvSpPr txBox="1"/>
-          <p:nvPr/>
-        </p:nvSpPr>
-        <p:spPr>
-          <a:xfrm>
-            <a:off x="1371600" y="1325880"/>
-            <a:ext cx="1828800" cy="274320"/>
-          </a:xfrm>
-          <a:prstGeom prst="rect">
-            <a:avLst/>
-          </a:prstGeom>
-          <a:noFill/>
-        </p:spPr>
-        <p:txBody>
-          <a:bodyPr wrap="square">
-            <a:spAutoFit/>
-          </a:bodyPr>
-          <a:lstStyle/>
-          <a:p>
-            <a:pPr algn="ctr">
-              <a:defRPr sz="1200" b="1">
-                <a:solidFill>
-                  <a:srgbClr val="3B82F6"/>
-                </a:solidFill>
-                <a:latin typeface="Microsoft YaHei"/>
-              </a:defRPr>
-            </a:pPr>
-            <a:r>
-              <a:t>M1-3</a:t>
-            </a:r>
-          </a:p>
-        </p:txBody>
-      </p:sp>
-      <p:sp>
-        <p:nvSpPr>
-          <p:cNvPr id="9" name="Rounded Rectangle 8"/>
+          <p:cNvPr id="23" name="Oval 22"/>
           <p:cNvSpPr/>
           <p:nvPr/>
         </p:nvSpPr>
         <p:spPr>
           <a:xfrm>
-            <a:off x="914400" y="2377440"/>
-            <a:ext cx="2926080" cy="2286000"/>
-          </a:xfrm>
-          <a:prstGeom prst="roundRect">
-            <a:avLst/>
-          </a:prstGeom>
-          <a:solidFill>
-            <a:srgbClr val="1E293B"/>
-          </a:solidFill>
-          <a:ln w="19050">
-            <a:solidFill>
-              <a:srgbClr val="3B82F6"/>
-            </a:solidFill>
-          </a:ln>
-          <a:effectLst/>
-        </p:spPr>
-        <p:style>
-          <a:lnRef idx="1">
-            <a:schemeClr val="accent1"/>
-          </a:lnRef>
-          <a:fillRef idx="3">
-            <a:schemeClr val="accent1"/>
-          </a:fillRef>
-          <a:effectRef idx="2">
-            <a:schemeClr val="accent1"/>
-          </a:effectRef>
-          <a:fontRef idx="minor">
-            <a:schemeClr val="lt1"/>
-          </a:fontRef>
-        </p:style>
-        <p:txBody>
-          <a:bodyPr rtlCol="0" anchor="ctr"/>
-          <a:lstStyle/>
-          <a:p>
-            <a:pPr algn="ctr"/>
-          </a:p>
-        </p:txBody>
-      </p:sp>
-      <p:sp>
-        <p:nvSpPr>
-          <p:cNvPr id="10" name="Rectangle 9"/>
-          <p:cNvSpPr/>
-          <p:nvPr/>
-        </p:nvSpPr>
-        <p:spPr>
-          <a:xfrm>
-            <a:off x="914400" y="2377440"/>
-            <a:ext cx="2926080" cy="45720"/>
-          </a:xfrm>
-          <a:prstGeom prst="rect">
+            <a:off x="4480560" y="2011680"/>
+            <a:ext cx="256032" cy="256032"/>
+          </a:xfrm>
+          <a:prstGeom prst="ellipse">
             <a:avLst/>
           </a:prstGeom>
           <a:solidFill>
@@ -3982,7 +4472,6 @@
           <a:ln>
             <a:noFill/>
           </a:ln>
-          <a:effectLst/>
         </p:spPr>
         <p:style>
           <a:lnRef idx="1">
@@ -4008,14 +4497,14 @@
       </p:sp>
       <p:sp>
         <p:nvSpPr>
-          <p:cNvPr id="11" name="TextBox 10"/>
-          <p:cNvSpPr txBox="1"/>
-          <p:nvPr/>
-        </p:nvSpPr>
-        <p:spPr>
-          <a:xfrm>
-            <a:off x="1097280" y="2514600"/>
-            <a:ext cx="2560320" cy="365760"/>
+          <p:cNvPr id="24" name="TextBox 23"/>
+          <p:cNvSpPr txBox="1"/>
+          <p:nvPr/>
+        </p:nvSpPr>
+        <p:spPr>
+          <a:xfrm>
+            <a:off x="4160520" y="1783080"/>
+            <a:ext cx="914400" cy="274320"/>
           </a:xfrm>
           <a:prstGeom prst="rect">
             <a:avLst/>
@@ -4029,31 +4518,31 @@
           <a:lstStyle/>
           <a:p>
             <a:pPr algn="ctr">
-              <a:defRPr sz="1500" b="1">
-                <a:solidFill>
-                  <a:srgbClr val="FFFFFF"/>
-                </a:solidFill>
-                <a:latin typeface="Microsoft YaHei"/>
-              </a:defRPr>
-            </a:pPr>
-            <a:r>
-              <a:t>MVP上线</a:t>
-            </a:r>
-          </a:p>
-        </p:txBody>
-      </p:sp>
-      <p:sp>
-        <p:nvSpPr>
-          <p:cNvPr id="12" name="Rounded Rectangle 11"/>
+              <a:defRPr sz="1200" b="1">
+                <a:solidFill>
+                  <a:srgbClr val="3B82F6"/>
+                </a:solidFill>
+                <a:latin typeface="微软雅黑"/>
+              </a:defRPr>
+            </a:pPr>
+            <a:r>
+              <a:t>M1-3</a:t>
+            </a:r>
+          </a:p>
+        </p:txBody>
+      </p:sp>
+      <p:sp>
+        <p:nvSpPr>
+          <p:cNvPr id="25" name="Oval 24"/>
           <p:cNvSpPr/>
           <p:nvPr/>
         </p:nvSpPr>
         <p:spPr>
           <a:xfrm>
-            <a:off x="1463040" y="2926080"/>
-            <a:ext cx="1828800" cy="320040"/>
-          </a:xfrm>
-          <a:prstGeom prst="roundRect">
+            <a:off x="5852160" y="2011680"/>
+            <a:ext cx="256032" cy="256032"/>
+          </a:xfrm>
+          <a:prstGeom prst="ellipse">
             <a:avLst/>
           </a:prstGeom>
           <a:solidFill>
@@ -4062,7 +4551,6 @@
           <a:ln>
             <a:noFill/>
           </a:ln>
-          <a:effectLst/>
         </p:spPr>
         <p:style>
           <a:lnRef idx="1">
@@ -4082,148 +4570,66 @@
           <a:bodyPr rtlCol="0" anchor="ctr"/>
           <a:lstStyle/>
           <a:p>
+            <a:pPr algn="ctr"/>
+          </a:p>
+        </p:txBody>
+      </p:sp>
+      <p:sp>
+        <p:nvSpPr>
+          <p:cNvPr id="26" name="TextBox 25"/>
+          <p:cNvSpPr txBox="1"/>
+          <p:nvPr/>
+        </p:nvSpPr>
+        <p:spPr>
+          <a:xfrm>
+            <a:off x="5532120" y="1783080"/>
+            <a:ext cx="914400" cy="274320"/>
+          </a:xfrm>
+          <a:prstGeom prst="rect">
+            <a:avLst/>
+          </a:prstGeom>
+          <a:noFill/>
+        </p:spPr>
+        <p:txBody>
+          <a:bodyPr wrap="square">
+            <a:spAutoFit/>
+          </a:bodyPr>
+          <a:lstStyle/>
+          <a:p>
             <a:pPr algn="ctr">
-              <a:defRPr sz="1000" b="1">
-                <a:solidFill>
-                  <a:srgbClr val="FFFFFF"/>
-                </a:solidFill>
-              </a:defRPr>
-            </a:pPr>
-            <a:r>
-              <a:t>种子用户1000+</a:t>
-            </a:r>
-          </a:p>
-        </p:txBody>
-      </p:sp>
-      <p:sp>
-        <p:nvSpPr>
-          <p:cNvPr id="13" name="TextBox 12"/>
-          <p:cNvSpPr txBox="1"/>
-          <p:nvPr/>
-        </p:nvSpPr>
-        <p:spPr>
-          <a:xfrm>
-            <a:off x="1188720" y="3383280"/>
-            <a:ext cx="2377440" cy="320040"/>
-          </a:xfrm>
-          <a:prstGeom prst="rect">
-            <a:avLst/>
-          </a:prstGeom>
-          <a:noFill/>
-        </p:spPr>
-        <p:txBody>
-          <a:bodyPr wrap="square">
-            <a:spAutoFit/>
-          </a:bodyPr>
-          <a:lstStyle/>
-          <a:p>
-            <a:pPr algn="l">
-              <a:defRPr sz="1100" b="0">
-                <a:solidFill>
-                  <a:srgbClr val="94A3B8"/>
-                </a:solidFill>
-                <a:latin typeface="Microsoft YaHei"/>
-              </a:defRPr>
-            </a:pPr>
-            <a:r>
-              <a:t>• 核心智能体开发完成</a:t>
-            </a:r>
-          </a:p>
-        </p:txBody>
-      </p:sp>
-      <p:sp>
-        <p:nvSpPr>
-          <p:cNvPr id="14" name="TextBox 13"/>
-          <p:cNvSpPr txBox="1"/>
-          <p:nvPr/>
-        </p:nvSpPr>
-        <p:spPr>
-          <a:xfrm>
-            <a:off x="1188720" y="3749040"/>
-            <a:ext cx="2377440" cy="320040"/>
-          </a:xfrm>
-          <a:prstGeom prst="rect">
-            <a:avLst/>
-          </a:prstGeom>
-          <a:noFill/>
-        </p:spPr>
-        <p:txBody>
-          <a:bodyPr wrap="square">
-            <a:spAutoFit/>
-          </a:bodyPr>
-          <a:lstStyle/>
-          <a:p>
-            <a:pPr algn="l">
-              <a:defRPr sz="1100" b="0">
-                <a:solidFill>
-                  <a:srgbClr val="94A3B8"/>
-                </a:solidFill>
-                <a:latin typeface="Microsoft YaHei"/>
-              </a:defRPr>
-            </a:pPr>
-            <a:r>
-              <a:t>• MVP版本上线</a:t>
-            </a:r>
-          </a:p>
-        </p:txBody>
-      </p:sp>
-      <p:sp>
-        <p:nvSpPr>
-          <p:cNvPr id="15" name="TextBox 14"/>
-          <p:cNvSpPr txBox="1"/>
-          <p:nvPr/>
-        </p:nvSpPr>
-        <p:spPr>
-          <a:xfrm>
-            <a:off x="1188720" y="4114800"/>
-            <a:ext cx="2377440" cy="320040"/>
-          </a:xfrm>
-          <a:prstGeom prst="rect">
-            <a:avLst/>
-          </a:prstGeom>
-          <a:noFill/>
-        </p:spPr>
-        <p:txBody>
-          <a:bodyPr wrap="square">
-            <a:spAutoFit/>
-          </a:bodyPr>
-          <a:lstStyle/>
-          <a:p>
-            <a:pPr algn="l">
-              <a:defRPr sz="1100" b="0">
-                <a:solidFill>
-                  <a:srgbClr val="94A3B8"/>
-                </a:solidFill>
-                <a:latin typeface="Microsoft YaHei"/>
-              </a:defRPr>
-            </a:pPr>
-            <a:r>
-              <a:t>• 种子用户获取1000+</a:t>
-            </a:r>
-          </a:p>
-        </p:txBody>
-      </p:sp>
-      <p:sp>
-        <p:nvSpPr>
-          <p:cNvPr id="16" name="Oval 15"/>
+              <a:defRPr sz="1200" b="1">
+                <a:solidFill>
+                  <a:srgbClr val="3B82F6"/>
+                </a:solidFill>
+                <a:latin typeface="微软雅黑"/>
+              </a:defRPr>
+            </a:pPr>
+            <a:r>
+              <a:t>M4-6</a:t>
+            </a:r>
+          </a:p>
+        </p:txBody>
+      </p:sp>
+      <p:sp>
+        <p:nvSpPr>
+          <p:cNvPr id="27" name="Oval 26"/>
           <p:cNvSpPr/>
           <p:nvPr/>
         </p:nvSpPr>
         <p:spPr>
           <a:xfrm>
-            <a:off x="5486400" y="1783080"/>
-            <a:ext cx="320040" cy="320040"/>
+            <a:off x="7223760" y="2011680"/>
+            <a:ext cx="256032" cy="256032"/>
           </a:xfrm>
           <a:prstGeom prst="ellipse">
             <a:avLst/>
           </a:prstGeom>
           <a:solidFill>
-            <a:srgbClr val="06B6D4"/>
+            <a:srgbClr val="3B82F6"/>
           </a:solidFill>
           <a:ln>
             <a:noFill/>
           </a:ln>
-          <a:effectLst/>
         </p:spPr>
         <p:style>
           <a:lnRef idx="1">
@@ -4249,14 +4655,14 @@
       </p:sp>
       <p:sp>
         <p:nvSpPr>
-          <p:cNvPr id="17" name="TextBox 16"/>
-          <p:cNvSpPr txBox="1"/>
-          <p:nvPr/>
-        </p:nvSpPr>
-        <p:spPr>
-          <a:xfrm>
-            <a:off x="4754880" y="1325880"/>
-            <a:ext cx="1828800" cy="274320"/>
+          <p:cNvPr id="28" name="TextBox 27"/>
+          <p:cNvSpPr txBox="1"/>
+          <p:nvPr/>
+        </p:nvSpPr>
+        <p:spPr>
+          <a:xfrm>
+            <a:off x="6903720" y="1783080"/>
+            <a:ext cx="914400" cy="274320"/>
           </a:xfrm>
           <a:prstGeom prst="rect">
             <a:avLst/>
@@ -4272,40 +4678,41 @@
             <a:pPr algn="ctr">
               <a:defRPr sz="1200" b="1">
                 <a:solidFill>
-                  <a:srgbClr val="06B6D4"/>
-                </a:solidFill>
-                <a:latin typeface="Microsoft YaHei"/>
-              </a:defRPr>
-            </a:pPr>
-            <a:r>
-              <a:t>M4-6</a:t>
-            </a:r>
-          </a:p>
-        </p:txBody>
-      </p:sp>
-      <p:sp>
-        <p:nvSpPr>
-          <p:cNvPr id="18" name="Rounded Rectangle 17"/>
+                  <a:srgbClr val="3B82F6"/>
+                </a:solidFill>
+                <a:latin typeface="微软雅黑"/>
+              </a:defRPr>
+            </a:pPr>
+            <a:r>
+              <a:t>M7-12</a:t>
+            </a:r>
+          </a:p>
+        </p:txBody>
+      </p:sp>
+      <p:sp>
+        <p:nvSpPr>
+          <p:cNvPr id="29" name="Rounded Rectangle 28"/>
           <p:cNvSpPr/>
           <p:nvPr/>
         </p:nvSpPr>
         <p:spPr>
           <a:xfrm>
-            <a:off x="4297680" y="2377440"/>
-            <a:ext cx="2926080" cy="2286000"/>
+            <a:off x="3931920" y="2468880"/>
+            <a:ext cx="1325880" cy="3017520"/>
           </a:xfrm>
           <a:prstGeom prst="roundRect">
-            <a:avLst/>
+            <a:avLst>
+              <a:gd name="adj" fmla="val 5000"/>
+            </a:avLst>
           </a:prstGeom>
           <a:solidFill>
             <a:srgbClr val="1E293B"/>
           </a:solidFill>
-          <a:ln w="19050">
+          <a:ln w="12700">
             <a:solidFill>
-              <a:srgbClr val="06B6D4"/>
+              <a:srgbClr val="334455"/>
             </a:solidFill>
           </a:ln>
-          <a:effectLst/>
         </p:spPr>
         <p:style>
           <a:lnRef idx="1">
@@ -4331,25 +4738,24 @@
       </p:sp>
       <p:sp>
         <p:nvSpPr>
-          <p:cNvPr id="19" name="Rectangle 18"/>
+          <p:cNvPr id="30" name="Rectangle 29"/>
           <p:cNvSpPr/>
           <p:nvPr/>
         </p:nvSpPr>
         <p:spPr>
           <a:xfrm>
-            <a:off x="4297680" y="2377440"/>
-            <a:ext cx="2926080" cy="45720"/>
+            <a:off x="3931920" y="2468880"/>
+            <a:ext cx="1325880" cy="36576"/>
           </a:xfrm>
           <a:prstGeom prst="rect">
             <a:avLst/>
           </a:prstGeom>
           <a:solidFill>
-            <a:srgbClr val="06B6D4"/>
+            <a:srgbClr val="3B82F6"/>
           </a:solidFill>
           <a:ln>
             <a:noFill/>
           </a:ln>
-          <a:effectLst/>
         </p:spPr>
         <p:style>
           <a:lnRef idx="1">
@@ -4375,14 +4781,14 @@
       </p:sp>
       <p:sp>
         <p:nvSpPr>
-          <p:cNvPr id="20" name="TextBox 19"/>
-          <p:cNvSpPr txBox="1"/>
-          <p:nvPr/>
-        </p:nvSpPr>
-        <p:spPr>
-          <a:xfrm>
-            <a:off x="4480560" y="2514600"/>
-            <a:ext cx="2560320" cy="365760"/>
+          <p:cNvPr id="31" name="TextBox 30"/>
+          <p:cNvSpPr txBox="1"/>
+          <p:nvPr/>
+        </p:nvSpPr>
+        <p:spPr>
+          <a:xfrm>
+            <a:off x="4023360" y="2606040"/>
+            <a:ext cx="1143000" cy="320040"/>
           </a:xfrm>
           <a:prstGeom prst="rect">
             <a:avLst/>
@@ -4396,868 +4802,43 @@
           <a:lstStyle/>
           <a:p>
             <a:pPr algn="ctr">
-              <a:defRPr sz="1500" b="1">
+              <a:defRPr sz="1400" b="1">
                 <a:solidFill>
                   <a:srgbClr val="FFFFFF"/>
                 </a:solidFill>
-                <a:latin typeface="Microsoft YaHei"/>
-              </a:defRPr>
-            </a:pPr>
-            <a:r>
-              <a:t>机构版发布</a:t>
-            </a:r>
-          </a:p>
-        </p:txBody>
-      </p:sp>
-      <p:sp>
-        <p:nvSpPr>
-          <p:cNvPr id="21" name="Rounded Rectangle 20"/>
+                <a:latin typeface="微软雅黑"/>
+              </a:defRPr>
+            </a:pPr>
+            <a:r>
+              <a:t>MVP上线</a:t>
+            </a:r>
+          </a:p>
+        </p:txBody>
+      </p:sp>
+      <p:sp>
+        <p:nvSpPr>
+          <p:cNvPr id="32" name="Rounded Rectangle 31"/>
           <p:cNvSpPr/>
           <p:nvPr/>
         </p:nvSpPr>
         <p:spPr>
           <a:xfrm>
-            <a:off x="4846320" y="2926080"/>
-            <a:ext cx="1828800" cy="320040"/>
+            <a:off x="4114800" y="2971800"/>
+            <a:ext cx="960120" cy="274320"/>
           </a:xfrm>
           <a:prstGeom prst="roundRect">
-            <a:avLst/>
+            <a:avLst>
+              <a:gd name="adj" fmla="val 5000"/>
+            </a:avLst>
           </a:prstGeom>
           <a:solidFill>
-            <a:srgbClr val="06B6D4"/>
-          </a:solidFill>
-          <a:ln>
-            <a:noFill/>
-          </a:ln>
-          <a:effectLst/>
-        </p:spPr>
-        <p:style>
-          <a:lnRef idx="1">
-            <a:schemeClr val="accent1"/>
-          </a:lnRef>
-          <a:fillRef idx="3">
-            <a:schemeClr val="accent1"/>
-          </a:fillRef>
-          <a:effectRef idx="2">
-            <a:schemeClr val="accent1"/>
-          </a:effectRef>
-          <a:fontRef idx="minor">
-            <a:schemeClr val="lt1"/>
-          </a:fontRef>
-        </p:style>
-        <p:txBody>
-          <a:bodyPr rtlCol="0" anchor="ctr"/>
-          <a:lstStyle/>
-          <a:p>
-            <a:pPr algn="ctr">
-              <a:defRPr sz="1000" b="1">
-                <a:solidFill>
-                  <a:srgbClr val="FFFFFF"/>
-                </a:solidFill>
-              </a:defRPr>
-            </a:pPr>
-            <a:r>
-              <a:t>10-20家付费</a:t>
-            </a:r>
-          </a:p>
-        </p:txBody>
-      </p:sp>
-      <p:sp>
-        <p:nvSpPr>
-          <p:cNvPr id="22" name="TextBox 21"/>
-          <p:cNvSpPr txBox="1"/>
-          <p:nvPr/>
-        </p:nvSpPr>
-        <p:spPr>
-          <a:xfrm>
-            <a:off x="4572000" y="3383280"/>
-            <a:ext cx="2377440" cy="320040"/>
-          </a:xfrm>
-          <a:prstGeom prst="rect">
-            <a:avLst/>
-          </a:prstGeom>
-          <a:noFill/>
-        </p:spPr>
-        <p:txBody>
-          <a:bodyPr wrap="square">
-            <a:spAutoFit/>
-          </a:bodyPr>
-          <a:lstStyle/>
-          <a:p>
-            <a:pPr algn="l">
-              <a:defRPr sz="1100" b="0">
-                <a:solidFill>
-                  <a:srgbClr val="94A3B8"/>
-                </a:solidFill>
-                <a:latin typeface="Microsoft YaHei"/>
-              </a:defRPr>
-            </a:pPr>
-            <a:r>
-              <a:t>• 机构版功能完善</a:t>
-            </a:r>
-          </a:p>
-        </p:txBody>
-      </p:sp>
-      <p:sp>
-        <p:nvSpPr>
-          <p:cNvPr id="23" name="TextBox 22"/>
-          <p:cNvSpPr txBox="1"/>
-          <p:nvPr/>
-        </p:nvSpPr>
-        <p:spPr>
-          <a:xfrm>
-            <a:off x="4572000" y="3749040"/>
-            <a:ext cx="2377440" cy="320040"/>
-          </a:xfrm>
-          <a:prstGeom prst="rect">
-            <a:avLst/>
-          </a:prstGeom>
-          <a:noFill/>
-        </p:spPr>
-        <p:txBody>
-          <a:bodyPr wrap="square">
-            <a:spAutoFit/>
-          </a:bodyPr>
-          <a:lstStyle/>
-          <a:p>
-            <a:pPr algn="l">
-              <a:defRPr sz="1100" b="0">
-                <a:solidFill>
-                  <a:srgbClr val="94A3B8"/>
-                </a:solidFill>
-                <a:latin typeface="Microsoft YaHei"/>
-              </a:defRPr>
-            </a:pPr>
-            <a:r>
-              <a:t>• 合规模块上线</a:t>
-            </a:r>
-          </a:p>
-        </p:txBody>
-      </p:sp>
-      <p:sp>
-        <p:nvSpPr>
-          <p:cNvPr id="24" name="TextBox 23"/>
-          <p:cNvSpPr txBox="1"/>
-          <p:nvPr/>
-        </p:nvSpPr>
-        <p:spPr>
-          <a:xfrm>
-            <a:off x="4572000" y="4114800"/>
-            <a:ext cx="2377440" cy="320040"/>
-          </a:xfrm>
-          <a:prstGeom prst="rect">
-            <a:avLst/>
-          </a:prstGeom>
-          <a:noFill/>
-        </p:spPr>
-        <p:txBody>
-          <a:bodyPr wrap="square">
-            <a:spAutoFit/>
-          </a:bodyPr>
-          <a:lstStyle/>
-          <a:p>
-            <a:pPr algn="l">
-              <a:defRPr sz="1100" b="0">
-                <a:solidFill>
-                  <a:srgbClr val="94A3B8"/>
-                </a:solidFill>
-                <a:latin typeface="Microsoft YaHei"/>
-              </a:defRPr>
-            </a:pPr>
-            <a:r>
-              <a:t>• 10-20家机构付费</a:t>
-            </a:r>
-          </a:p>
-        </p:txBody>
-      </p:sp>
-      <p:sp>
-        <p:nvSpPr>
-          <p:cNvPr id="25" name="Oval 24"/>
-          <p:cNvSpPr/>
-          <p:nvPr/>
-        </p:nvSpPr>
-        <p:spPr>
-          <a:xfrm>
-            <a:off x="8869680" y="1783080"/>
-            <a:ext cx="320040" cy="320040"/>
-          </a:xfrm>
-          <a:prstGeom prst="ellipse">
-            <a:avLst/>
-          </a:prstGeom>
-          <a:solidFill>
-            <a:srgbClr val="10B981"/>
-          </a:solidFill>
-          <a:ln>
-            <a:noFill/>
-          </a:ln>
-          <a:effectLst/>
-        </p:spPr>
-        <p:style>
-          <a:lnRef idx="1">
-            <a:schemeClr val="accent1"/>
-          </a:lnRef>
-          <a:fillRef idx="3">
-            <a:schemeClr val="accent1"/>
-          </a:fillRef>
-          <a:effectRef idx="2">
-            <a:schemeClr val="accent1"/>
-          </a:effectRef>
-          <a:fontRef idx="minor">
-            <a:schemeClr val="lt1"/>
-          </a:fontRef>
-        </p:style>
-        <p:txBody>
-          <a:bodyPr rtlCol="0" anchor="ctr"/>
-          <a:lstStyle/>
-          <a:p>
-            <a:pPr algn="ctr"/>
-          </a:p>
-        </p:txBody>
-      </p:sp>
-      <p:sp>
-        <p:nvSpPr>
-          <p:cNvPr id="26" name="TextBox 25"/>
-          <p:cNvSpPr txBox="1"/>
-          <p:nvPr/>
-        </p:nvSpPr>
-        <p:spPr>
-          <a:xfrm>
-            <a:off x="8138160" y="1325880"/>
-            <a:ext cx="1828800" cy="274320"/>
-          </a:xfrm>
-          <a:prstGeom prst="rect">
-            <a:avLst/>
-          </a:prstGeom>
-          <a:noFill/>
-        </p:spPr>
-        <p:txBody>
-          <a:bodyPr wrap="square">
-            <a:spAutoFit/>
-          </a:bodyPr>
-          <a:lstStyle/>
-          <a:p>
-            <a:pPr algn="ctr">
-              <a:defRPr sz="1200" b="1">
-                <a:solidFill>
-                  <a:srgbClr val="10B981"/>
-                </a:solidFill>
-                <a:latin typeface="Microsoft YaHei"/>
-              </a:defRPr>
-            </a:pPr>
-            <a:r>
-              <a:t>M7-12</a:t>
-            </a:r>
-          </a:p>
-        </p:txBody>
-      </p:sp>
-      <p:sp>
-        <p:nvSpPr>
-          <p:cNvPr id="27" name="Rounded Rectangle 26"/>
-          <p:cNvSpPr/>
-          <p:nvPr/>
-        </p:nvSpPr>
-        <p:spPr>
-          <a:xfrm>
-            <a:off x="7680960" y="2377440"/>
-            <a:ext cx="2926080" cy="2286000"/>
-          </a:xfrm>
-          <a:prstGeom prst="roundRect">
-            <a:avLst/>
-          </a:prstGeom>
-          <a:solidFill>
-            <a:srgbClr val="1E293B"/>
-          </a:solidFill>
-          <a:ln w="19050">
-            <a:solidFill>
-              <a:srgbClr val="10B981"/>
-            </a:solidFill>
-          </a:ln>
-          <a:effectLst/>
-        </p:spPr>
-        <p:style>
-          <a:lnRef idx="1">
-            <a:schemeClr val="accent1"/>
-          </a:lnRef>
-          <a:fillRef idx="3">
-            <a:schemeClr val="accent1"/>
-          </a:fillRef>
-          <a:effectRef idx="2">
-            <a:schemeClr val="accent1"/>
-          </a:effectRef>
-          <a:fontRef idx="minor">
-            <a:schemeClr val="lt1"/>
-          </a:fontRef>
-        </p:style>
-        <p:txBody>
-          <a:bodyPr rtlCol="0" anchor="ctr"/>
-          <a:lstStyle/>
-          <a:p>
-            <a:pPr algn="ctr"/>
-          </a:p>
-        </p:txBody>
-      </p:sp>
-      <p:sp>
-        <p:nvSpPr>
-          <p:cNvPr id="28" name="Rectangle 27"/>
-          <p:cNvSpPr/>
-          <p:nvPr/>
-        </p:nvSpPr>
-        <p:spPr>
-          <a:xfrm>
-            <a:off x="7680960" y="2377440"/>
-            <a:ext cx="2926080" cy="45720"/>
-          </a:xfrm>
-          <a:prstGeom prst="rect">
-            <a:avLst/>
-          </a:prstGeom>
-          <a:solidFill>
-            <a:srgbClr val="10B981"/>
-          </a:solidFill>
-          <a:ln>
-            <a:noFill/>
-          </a:ln>
-          <a:effectLst/>
-        </p:spPr>
-        <p:style>
-          <a:lnRef idx="1">
-            <a:schemeClr val="accent1"/>
-          </a:lnRef>
-          <a:fillRef idx="3">
-            <a:schemeClr val="accent1"/>
-          </a:fillRef>
-          <a:effectRef idx="2">
-            <a:schemeClr val="accent1"/>
-          </a:effectRef>
-          <a:fontRef idx="minor">
-            <a:schemeClr val="lt1"/>
-          </a:fontRef>
-        </p:style>
-        <p:txBody>
-          <a:bodyPr rtlCol="0" anchor="ctr"/>
-          <a:lstStyle/>
-          <a:p>
-            <a:pPr algn="ctr"/>
-          </a:p>
-        </p:txBody>
-      </p:sp>
-      <p:sp>
-        <p:nvSpPr>
-          <p:cNvPr id="29" name="TextBox 28"/>
-          <p:cNvSpPr txBox="1"/>
-          <p:nvPr/>
-        </p:nvSpPr>
-        <p:spPr>
-          <a:xfrm>
-            <a:off x="7863840" y="2514600"/>
-            <a:ext cx="2560320" cy="365760"/>
-          </a:xfrm>
-          <a:prstGeom prst="rect">
-            <a:avLst/>
-          </a:prstGeom>
-          <a:noFill/>
-        </p:spPr>
-        <p:txBody>
-          <a:bodyPr wrap="square">
-            <a:spAutoFit/>
-          </a:bodyPr>
-          <a:lstStyle/>
-          <a:p>
-            <a:pPr algn="ctr">
-              <a:defRPr sz="1500" b="1">
-                <a:solidFill>
-                  <a:srgbClr val="FFFFFF"/>
-                </a:solidFill>
-                <a:latin typeface="Microsoft YaHei"/>
-              </a:defRPr>
-            </a:pPr>
-            <a:r>
-              <a:t>企业版发布</a:t>
-            </a:r>
-          </a:p>
-        </p:txBody>
-      </p:sp>
-      <p:sp>
-        <p:nvSpPr>
-          <p:cNvPr id="30" name="Rounded Rectangle 29"/>
-          <p:cNvSpPr/>
-          <p:nvPr/>
-        </p:nvSpPr>
-        <p:spPr>
-          <a:xfrm>
-            <a:off x="8229600" y="2926080"/>
-            <a:ext cx="1828800" cy="320040"/>
-          </a:xfrm>
-          <a:prstGeom prst="roundRect">
-            <a:avLst/>
-          </a:prstGeom>
-          <a:solidFill>
-            <a:srgbClr val="10B981"/>
-          </a:solidFill>
-          <a:ln>
-            <a:noFill/>
-          </a:ln>
-          <a:effectLst/>
-        </p:spPr>
-        <p:style>
-          <a:lnRef idx="1">
-            <a:schemeClr val="accent1"/>
-          </a:lnRef>
-          <a:fillRef idx="3">
-            <a:schemeClr val="accent1"/>
-          </a:fillRef>
-          <a:effectRef idx="2">
-            <a:schemeClr val="accent1"/>
-          </a:effectRef>
-          <a:fontRef idx="minor">
-            <a:schemeClr val="lt1"/>
-          </a:fontRef>
-        </p:style>
-        <p:txBody>
-          <a:bodyPr rtlCol="0" anchor="ctr"/>
-          <a:lstStyle/>
-          <a:p>
-            <a:pPr algn="ctr">
-              <a:defRPr sz="1000" b="1">
-                <a:solidFill>
-                  <a:srgbClr val="FFFFFF"/>
-                </a:solidFill>
-              </a:defRPr>
-            </a:pPr>
-            <a:r>
-              <a:t>3-5家大客户</a:t>
-            </a:r>
-          </a:p>
-        </p:txBody>
-      </p:sp>
-      <p:sp>
-        <p:nvSpPr>
-          <p:cNvPr id="31" name="TextBox 30"/>
-          <p:cNvSpPr txBox="1"/>
-          <p:nvPr/>
-        </p:nvSpPr>
-        <p:spPr>
-          <a:xfrm>
-            <a:off x="7955280" y="3383280"/>
-            <a:ext cx="2377440" cy="320040"/>
-          </a:xfrm>
-          <a:prstGeom prst="rect">
-            <a:avLst/>
-          </a:prstGeom>
-          <a:noFill/>
-        </p:spPr>
-        <p:txBody>
-          <a:bodyPr wrap="square">
-            <a:spAutoFit/>
-          </a:bodyPr>
-          <a:lstStyle/>
-          <a:p>
-            <a:pPr algn="l">
-              <a:defRPr sz="1100" b="0">
-                <a:solidFill>
-                  <a:srgbClr val="94A3B8"/>
-                </a:solidFill>
-                <a:latin typeface="Microsoft YaHei"/>
-              </a:defRPr>
-            </a:pPr>
-            <a:r>
-              <a:t>• 企业版私有化部署</a:t>
-            </a:r>
-          </a:p>
-        </p:txBody>
-      </p:sp>
-      <p:sp>
-        <p:nvSpPr>
-          <p:cNvPr id="32" name="TextBox 31"/>
-          <p:cNvSpPr txBox="1"/>
-          <p:nvPr/>
-        </p:nvSpPr>
-        <p:spPr>
-          <a:xfrm>
-            <a:off x="7955280" y="3749040"/>
-            <a:ext cx="2377440" cy="320040"/>
-          </a:xfrm>
-          <a:prstGeom prst="rect">
-            <a:avLst/>
-          </a:prstGeom>
-          <a:noFill/>
-        </p:spPr>
-        <p:txBody>
-          <a:bodyPr wrap="square">
-            <a:spAutoFit/>
-          </a:bodyPr>
-          <a:lstStyle/>
-          <a:p>
-            <a:pPr algn="l">
-              <a:defRPr sz="1100" b="0">
-                <a:solidFill>
-                  <a:srgbClr val="94A3B8"/>
-                </a:solidFill>
-                <a:latin typeface="Microsoft YaHei"/>
-              </a:defRPr>
-            </a:pPr>
-            <a:r>
-              <a:t>• 3-5家大客户签约</a:t>
-            </a:r>
-          </a:p>
-        </p:txBody>
-      </p:sp>
-      <p:sp>
-        <p:nvSpPr>
-          <p:cNvPr id="33" name="TextBox 32"/>
-          <p:cNvSpPr txBox="1"/>
-          <p:nvPr/>
-        </p:nvSpPr>
-        <p:spPr>
-          <a:xfrm>
-            <a:off x="7955280" y="4114800"/>
-            <a:ext cx="2377440" cy="320040"/>
-          </a:xfrm>
-          <a:prstGeom prst="rect">
-            <a:avLst/>
-          </a:prstGeom>
-          <a:noFill/>
-        </p:spPr>
-        <p:txBody>
-          <a:bodyPr wrap="square">
-            <a:spAutoFit/>
-          </a:bodyPr>
-          <a:lstStyle/>
-          <a:p>
-            <a:pPr algn="l">
-              <a:defRPr sz="1100" b="0">
-                <a:solidFill>
-                  <a:srgbClr val="94A3B8"/>
-                </a:solidFill>
-                <a:latin typeface="Microsoft YaHei"/>
-              </a:defRPr>
-            </a:pPr>
-            <a:r>
-              <a:t>• 营收突破5000万</a:t>
-            </a:r>
-          </a:p>
-        </p:txBody>
-      </p:sp>
-      <p:sp>
-        <p:nvSpPr>
-          <p:cNvPr id="34" name="Rounded Rectangle 33"/>
-          <p:cNvSpPr/>
-          <p:nvPr/>
-        </p:nvSpPr>
-        <p:spPr>
-          <a:xfrm>
-            <a:off x="914400" y="4846320"/>
-            <a:ext cx="5029200" cy="1645920"/>
-          </a:xfrm>
-          <a:prstGeom prst="roundRect">
-            <a:avLst/>
-          </a:prstGeom>
-          <a:solidFill>
-            <a:srgbClr val="1E293B"/>
-          </a:solidFill>
-          <a:ln w="25400">
-            <a:solidFill>
-              <a:srgbClr val="F59E0B"/>
-            </a:solidFill>
-          </a:ln>
-          <a:effectLst/>
-        </p:spPr>
-        <p:style>
-          <a:lnRef idx="1">
-            <a:schemeClr val="accent1"/>
-          </a:lnRef>
-          <a:fillRef idx="3">
-            <a:schemeClr val="accent1"/>
-          </a:fillRef>
-          <a:effectRef idx="2">
-            <a:schemeClr val="accent1"/>
-          </a:effectRef>
-          <a:fontRef idx="minor">
-            <a:schemeClr val="lt1"/>
-          </a:fontRef>
-        </p:style>
-        <p:txBody>
-          <a:bodyPr rtlCol="0" anchor="ctr"/>
-          <a:lstStyle/>
-          <a:p>
-            <a:pPr algn="ctr"/>
-          </a:p>
-        </p:txBody>
-      </p:sp>
-      <p:sp>
-        <p:nvSpPr>
-          <p:cNvPr id="35" name="TextBox 34"/>
-          <p:cNvSpPr txBox="1"/>
-          <p:nvPr/>
-        </p:nvSpPr>
-        <p:spPr>
-          <a:xfrm>
-            <a:off x="1188720" y="4983480"/>
-            <a:ext cx="4572000" cy="365760"/>
-          </a:xfrm>
-          <a:prstGeom prst="rect">
-            <a:avLst/>
-          </a:prstGeom>
-          <a:noFill/>
-        </p:spPr>
-        <p:txBody>
-          <a:bodyPr wrap="square">
-            <a:spAutoFit/>
-          </a:bodyPr>
-          <a:lstStyle/>
-          <a:p>
-            <a:pPr algn="l">
-              <a:defRPr sz="1600" b="1">
-                <a:solidFill>
-                  <a:srgbClr val="F59E0B"/>
-                </a:solidFill>
-                <a:latin typeface="Microsoft YaHei"/>
-              </a:defRPr>
-            </a:pPr>
-            <a:r>
-              <a:t>💰 融资需求</a:t>
-            </a:r>
-          </a:p>
-        </p:txBody>
-      </p:sp>
-      <p:sp>
-        <p:nvSpPr>
-          <p:cNvPr id="36" name="TextBox 35"/>
-          <p:cNvSpPr txBox="1"/>
-          <p:nvPr/>
-        </p:nvSpPr>
-        <p:spPr>
-          <a:xfrm>
-            <a:off x="1188720" y="5394960"/>
-            <a:ext cx="2103120" cy="274320"/>
-          </a:xfrm>
-          <a:prstGeom prst="rect">
-            <a:avLst/>
-          </a:prstGeom>
-          <a:noFill/>
-        </p:spPr>
-        <p:txBody>
-          <a:bodyPr wrap="square">
-            <a:spAutoFit/>
-          </a:bodyPr>
-          <a:lstStyle/>
-          <a:p>
-            <a:pPr algn="l">
-              <a:defRPr sz="1300" b="1">
-                <a:solidFill>
-                  <a:srgbClr val="FFFFFF"/>
-                </a:solidFill>
-                <a:latin typeface="Microsoft YaHei"/>
-              </a:defRPr>
-            </a:pPr>
-            <a:r>
-              <a:t>天使轮</a:t>
-            </a:r>
-          </a:p>
-        </p:txBody>
-      </p:sp>
-      <p:sp>
-        <p:nvSpPr>
-          <p:cNvPr id="37" name="TextBox 36"/>
-          <p:cNvSpPr txBox="1"/>
-          <p:nvPr/>
-        </p:nvSpPr>
-        <p:spPr>
-          <a:xfrm>
-            <a:off x="1188720" y="5669280"/>
-            <a:ext cx="2103120" cy="274320"/>
-          </a:xfrm>
-          <a:prstGeom prst="rect">
-            <a:avLst/>
-          </a:prstGeom>
-          <a:noFill/>
-        </p:spPr>
-        <p:txBody>
-          <a:bodyPr wrap="square">
-            <a:spAutoFit/>
-          </a:bodyPr>
-          <a:lstStyle/>
-          <a:p>
-            <a:pPr algn="l">
-              <a:defRPr sz="2000" b="1">
-                <a:solidFill>
-                  <a:srgbClr val="F59E0B"/>
-                </a:solidFill>
-                <a:latin typeface="Microsoft YaHei"/>
-              </a:defRPr>
-            </a:pPr>
-            <a:r>
-              <a:t>500万</a:t>
-            </a:r>
-          </a:p>
-        </p:txBody>
-      </p:sp>
-      <p:sp>
-        <p:nvSpPr>
-          <p:cNvPr id="38" name="TextBox 37"/>
-          <p:cNvSpPr txBox="1"/>
-          <p:nvPr/>
-        </p:nvSpPr>
-        <p:spPr>
-          <a:xfrm>
-            <a:off x="1188720" y="5943600"/>
-            <a:ext cx="2103120" cy="274320"/>
-          </a:xfrm>
-          <a:prstGeom prst="rect">
-            <a:avLst/>
-          </a:prstGeom>
-          <a:noFill/>
-        </p:spPr>
-        <p:txBody>
-          <a:bodyPr wrap="square">
-            <a:spAutoFit/>
-          </a:bodyPr>
-          <a:lstStyle/>
-          <a:p>
-            <a:pPr algn="l">
-              <a:defRPr sz="1000" b="0">
-                <a:solidFill>
-                  <a:srgbClr val="94A3B8"/>
-                </a:solidFill>
-                <a:latin typeface="Microsoft YaHei"/>
-              </a:defRPr>
-            </a:pPr>
-            <a:r>
-              <a:t>MVP开发 + 种子用户</a:t>
-            </a:r>
-          </a:p>
-        </p:txBody>
-      </p:sp>
-      <p:sp>
-        <p:nvSpPr>
-          <p:cNvPr id="39" name="TextBox 38"/>
-          <p:cNvSpPr txBox="1"/>
-          <p:nvPr/>
-        </p:nvSpPr>
-        <p:spPr>
-          <a:xfrm>
-            <a:off x="3657600" y="5394960"/>
-            <a:ext cx="2103120" cy="274320"/>
-          </a:xfrm>
-          <a:prstGeom prst="rect">
-            <a:avLst/>
-          </a:prstGeom>
-          <a:noFill/>
-        </p:spPr>
-        <p:txBody>
-          <a:bodyPr wrap="square">
-            <a:spAutoFit/>
-          </a:bodyPr>
-          <a:lstStyle/>
-          <a:p>
-            <a:pPr algn="l">
-              <a:defRPr sz="1300" b="1">
-                <a:solidFill>
-                  <a:srgbClr val="FFFFFF"/>
-                </a:solidFill>
-                <a:latin typeface="Microsoft YaHei"/>
-              </a:defRPr>
-            </a:pPr>
-            <a:r>
-              <a:t>Pre-A轮</a:t>
-            </a:r>
-          </a:p>
-        </p:txBody>
-      </p:sp>
-      <p:sp>
-        <p:nvSpPr>
-          <p:cNvPr id="40" name="TextBox 39"/>
-          <p:cNvSpPr txBox="1"/>
-          <p:nvPr/>
-        </p:nvSpPr>
-        <p:spPr>
-          <a:xfrm>
-            <a:off x="3657600" y="5669280"/>
-            <a:ext cx="2103120" cy="274320"/>
-          </a:xfrm>
-          <a:prstGeom prst="rect">
-            <a:avLst/>
-          </a:prstGeom>
-          <a:noFill/>
-        </p:spPr>
-        <p:txBody>
-          <a:bodyPr wrap="square">
-            <a:spAutoFit/>
-          </a:bodyPr>
-          <a:lstStyle/>
-          <a:p>
-            <a:pPr algn="l">
-              <a:defRPr sz="2000" b="1">
-                <a:solidFill>
-                  <a:srgbClr val="F59E0B"/>
-                </a:solidFill>
-                <a:latin typeface="Microsoft YaHei"/>
-              </a:defRPr>
-            </a:pPr>
-            <a:r>
-              <a:t>2000万</a:t>
-            </a:r>
-          </a:p>
-        </p:txBody>
-      </p:sp>
-      <p:sp>
-        <p:nvSpPr>
-          <p:cNvPr id="41" name="TextBox 40"/>
-          <p:cNvSpPr txBox="1"/>
-          <p:nvPr/>
-        </p:nvSpPr>
-        <p:spPr>
-          <a:xfrm>
-            <a:off x="3657600" y="5943600"/>
-            <a:ext cx="2103120" cy="274320"/>
-          </a:xfrm>
-          <a:prstGeom prst="rect">
-            <a:avLst/>
-          </a:prstGeom>
-          <a:noFill/>
-        </p:spPr>
-        <p:txBody>
-          <a:bodyPr wrap="square">
-            <a:spAutoFit/>
-          </a:bodyPr>
-          <a:lstStyle/>
-          <a:p>
-            <a:pPr algn="l">
-              <a:defRPr sz="1000" b="0">
-                <a:solidFill>
-                  <a:srgbClr val="94A3B8"/>
-                </a:solidFill>
-                <a:latin typeface="Microsoft YaHei"/>
-              </a:defRPr>
-            </a:pPr>
-            <a:r>
-              <a:t>机构版 + 市场拓展</a:t>
-            </a:r>
-          </a:p>
-        </p:txBody>
-      </p:sp>
-      <p:sp>
-        <p:nvSpPr>
-          <p:cNvPr id="42" name="Rounded Rectangle 41"/>
-          <p:cNvSpPr/>
-          <p:nvPr/>
-        </p:nvSpPr>
-        <p:spPr>
-          <a:xfrm>
-            <a:off x="6400800" y="4846320"/>
-            <a:ext cx="5029200" cy="1645920"/>
-          </a:xfrm>
-          <a:prstGeom prst="roundRect">
-            <a:avLst/>
-          </a:prstGeom>
-          <a:solidFill>
-            <a:srgbClr val="1E293B"/>
+            <a:srgbClr val="1E3A5F"/>
           </a:solidFill>
           <a:ln w="12700">
             <a:solidFill>
               <a:srgbClr val="3B82F6"/>
             </a:solidFill>
           </a:ln>
-          <a:effectLst/>
         </p:spPr>
         <p:style>
           <a:lnRef idx="1">
@@ -5283,14 +4864,972 @@
       </p:sp>
       <p:sp>
         <p:nvSpPr>
+          <p:cNvPr id="33" name="TextBox 32"/>
+          <p:cNvSpPr txBox="1"/>
+          <p:nvPr/>
+        </p:nvSpPr>
+        <p:spPr>
+          <a:xfrm>
+            <a:off x="4114800" y="2971800"/>
+            <a:ext cx="960120" cy="274320"/>
+          </a:xfrm>
+          <a:prstGeom prst="rect">
+            <a:avLst/>
+          </a:prstGeom>
+          <a:noFill/>
+        </p:spPr>
+        <p:txBody>
+          <a:bodyPr wrap="square">
+            <a:spAutoFit/>
+          </a:bodyPr>
+          <a:lstStyle/>
+          <a:p>
+            <a:pPr algn="ctr">
+              <a:defRPr sz="900" b="1">
+                <a:solidFill>
+                  <a:srgbClr val="3B82F6"/>
+                </a:solidFill>
+                <a:latin typeface="微软雅黑"/>
+              </a:defRPr>
+            </a:pPr>
+            <a:r>
+              <a:t>种子用户1000+</a:t>
+            </a:r>
+          </a:p>
+        </p:txBody>
+      </p:sp>
+      <p:sp>
+        <p:nvSpPr>
+          <p:cNvPr id="34" name="TextBox 33"/>
+          <p:cNvSpPr txBox="1"/>
+          <p:nvPr/>
+        </p:nvSpPr>
+        <p:spPr>
+          <a:xfrm>
+            <a:off x="4069080" y="3383280"/>
+            <a:ext cx="1097280" cy="228600"/>
+          </a:xfrm>
+          <a:prstGeom prst="rect">
+            <a:avLst/>
+          </a:prstGeom>
+          <a:noFill/>
+        </p:spPr>
+        <p:txBody>
+          <a:bodyPr wrap="square">
+            <a:spAutoFit/>
+          </a:bodyPr>
+          <a:lstStyle/>
+          <a:p>
+            <a:pPr algn="l">
+              <a:defRPr sz="900" b="0">
+                <a:solidFill>
+                  <a:srgbClr val="94A3B8"/>
+                </a:solidFill>
+                <a:latin typeface="微软雅黑"/>
+              </a:defRPr>
+            </a:pPr>
+            <a:r>
+              <a:t>• 核心智能体开发</a:t>
+            </a:r>
+          </a:p>
+        </p:txBody>
+      </p:sp>
+      <p:sp>
+        <p:nvSpPr>
+          <p:cNvPr id="35" name="TextBox 34"/>
+          <p:cNvSpPr txBox="1"/>
+          <p:nvPr/>
+        </p:nvSpPr>
+        <p:spPr>
+          <a:xfrm>
+            <a:off x="4069080" y="3611880"/>
+            <a:ext cx="1097280" cy="228600"/>
+          </a:xfrm>
+          <a:prstGeom prst="rect">
+            <a:avLst/>
+          </a:prstGeom>
+          <a:noFill/>
+        </p:spPr>
+        <p:txBody>
+          <a:bodyPr wrap="square">
+            <a:spAutoFit/>
+          </a:bodyPr>
+          <a:lstStyle/>
+          <a:p>
+            <a:pPr algn="l">
+              <a:defRPr sz="900" b="0">
+                <a:solidFill>
+                  <a:srgbClr val="94A3B8"/>
+                </a:solidFill>
+                <a:latin typeface="微软雅黑"/>
+              </a:defRPr>
+            </a:pPr>
+            <a:r>
+              <a:t>• MVP版本上线</a:t>
+            </a:r>
+          </a:p>
+        </p:txBody>
+      </p:sp>
+      <p:sp>
+        <p:nvSpPr>
+          <p:cNvPr id="36" name="TextBox 35"/>
+          <p:cNvSpPr txBox="1"/>
+          <p:nvPr/>
+        </p:nvSpPr>
+        <p:spPr>
+          <a:xfrm>
+            <a:off x="4069080" y="3840480"/>
+            <a:ext cx="1097280" cy="228600"/>
+          </a:xfrm>
+          <a:prstGeom prst="rect">
+            <a:avLst/>
+          </a:prstGeom>
+          <a:noFill/>
+        </p:spPr>
+        <p:txBody>
+          <a:bodyPr wrap="square">
+            <a:spAutoFit/>
+          </a:bodyPr>
+          <a:lstStyle/>
+          <a:p>
+            <a:pPr algn="l">
+              <a:defRPr sz="900" b="0">
+                <a:solidFill>
+                  <a:srgbClr val="94A3B8"/>
+                </a:solidFill>
+                <a:latin typeface="微软雅黑"/>
+              </a:defRPr>
+            </a:pPr>
+            <a:r>
+              <a:t>• 种子用户获取</a:t>
+            </a:r>
+          </a:p>
+        </p:txBody>
+      </p:sp>
+      <p:sp>
+        <p:nvSpPr>
+          <p:cNvPr id="37" name="TextBox 36"/>
+          <p:cNvSpPr txBox="1"/>
+          <p:nvPr/>
+        </p:nvSpPr>
+        <p:spPr>
+          <a:xfrm>
+            <a:off x="4069080" y="4069080"/>
+            <a:ext cx="1097280" cy="228600"/>
+          </a:xfrm>
+          <a:prstGeom prst="rect">
+            <a:avLst/>
+          </a:prstGeom>
+          <a:noFill/>
+        </p:spPr>
+        <p:txBody>
+          <a:bodyPr wrap="square">
+            <a:spAutoFit/>
+          </a:bodyPr>
+          <a:lstStyle/>
+          <a:p>
+            <a:pPr algn="l">
+              <a:defRPr sz="900" b="0">
+                <a:solidFill>
+                  <a:srgbClr val="94A3B8"/>
+                </a:solidFill>
+                <a:latin typeface="微软雅黑"/>
+              </a:defRPr>
+            </a:pPr>
+            <a:r>
+              <a:t>• 产品验证迭代</a:t>
+            </a:r>
+          </a:p>
+        </p:txBody>
+      </p:sp>
+      <p:sp>
+        <p:nvSpPr>
+          <p:cNvPr id="38" name="TextBox 37"/>
+          <p:cNvSpPr txBox="1"/>
+          <p:nvPr/>
+        </p:nvSpPr>
+        <p:spPr>
+          <a:xfrm>
+            <a:off x="5257800" y="3474720"/>
+            <a:ext cx="457200" cy="365760"/>
+          </a:xfrm>
+          <a:prstGeom prst="rect">
+            <a:avLst/>
+          </a:prstGeom>
+          <a:noFill/>
+        </p:spPr>
+        <p:txBody>
+          <a:bodyPr wrap="square">
+            <a:spAutoFit/>
+          </a:bodyPr>
+          <a:lstStyle/>
+          <a:p>
+            <a:pPr algn="ctr">
+              <a:defRPr sz="2000" b="1">
+                <a:solidFill>
+                  <a:srgbClr val="3B82F6"/>
+                </a:solidFill>
+                <a:latin typeface="微软雅黑"/>
+              </a:defRPr>
+            </a:pPr>
+            <a:r>
+              <a:t>→</a:t>
+            </a:r>
+          </a:p>
+        </p:txBody>
+      </p:sp>
+      <p:sp>
+        <p:nvSpPr>
+          <p:cNvPr id="39" name="Rounded Rectangle 38"/>
+          <p:cNvSpPr/>
+          <p:nvPr/>
+        </p:nvSpPr>
+        <p:spPr>
+          <a:xfrm>
+            <a:off x="5440680" y="2468880"/>
+            <a:ext cx="1325880" cy="3017520"/>
+          </a:xfrm>
+          <a:prstGeom prst="roundRect">
+            <a:avLst>
+              <a:gd name="adj" fmla="val 5000"/>
+            </a:avLst>
+          </a:prstGeom>
+          <a:solidFill>
+            <a:srgbClr val="1E293B"/>
+          </a:solidFill>
+          <a:ln w="12700">
+            <a:solidFill>
+              <a:srgbClr val="334455"/>
+            </a:solidFill>
+          </a:ln>
+        </p:spPr>
+        <p:style>
+          <a:lnRef idx="1">
+            <a:schemeClr val="accent1"/>
+          </a:lnRef>
+          <a:fillRef idx="3">
+            <a:schemeClr val="accent1"/>
+          </a:fillRef>
+          <a:effectRef idx="2">
+            <a:schemeClr val="accent1"/>
+          </a:effectRef>
+          <a:fontRef idx="minor">
+            <a:schemeClr val="lt1"/>
+          </a:fontRef>
+        </p:style>
+        <p:txBody>
+          <a:bodyPr rtlCol="0" anchor="ctr"/>
+          <a:lstStyle/>
+          <a:p>
+            <a:pPr algn="ctr"/>
+          </a:p>
+        </p:txBody>
+      </p:sp>
+      <p:sp>
+        <p:nvSpPr>
+          <p:cNvPr id="40" name="Rectangle 39"/>
+          <p:cNvSpPr/>
+          <p:nvPr/>
+        </p:nvSpPr>
+        <p:spPr>
+          <a:xfrm>
+            <a:off x="5440680" y="2468880"/>
+            <a:ext cx="1325880" cy="36576"/>
+          </a:xfrm>
+          <a:prstGeom prst="rect">
+            <a:avLst/>
+          </a:prstGeom>
+          <a:solidFill>
+            <a:srgbClr val="3B82F6"/>
+          </a:solidFill>
+          <a:ln>
+            <a:noFill/>
+          </a:ln>
+        </p:spPr>
+        <p:style>
+          <a:lnRef idx="1">
+            <a:schemeClr val="accent1"/>
+          </a:lnRef>
+          <a:fillRef idx="3">
+            <a:schemeClr val="accent1"/>
+          </a:fillRef>
+          <a:effectRef idx="2">
+            <a:schemeClr val="accent1"/>
+          </a:effectRef>
+          <a:fontRef idx="minor">
+            <a:schemeClr val="lt1"/>
+          </a:fontRef>
+        </p:style>
+        <p:txBody>
+          <a:bodyPr rtlCol="0" anchor="ctr"/>
+          <a:lstStyle/>
+          <a:p>
+            <a:pPr algn="ctr"/>
+          </a:p>
+        </p:txBody>
+      </p:sp>
+      <p:sp>
+        <p:nvSpPr>
+          <p:cNvPr id="41" name="TextBox 40"/>
+          <p:cNvSpPr txBox="1"/>
+          <p:nvPr/>
+        </p:nvSpPr>
+        <p:spPr>
+          <a:xfrm>
+            <a:off x="5532120" y="2606040"/>
+            <a:ext cx="1143000" cy="320040"/>
+          </a:xfrm>
+          <a:prstGeom prst="rect">
+            <a:avLst/>
+          </a:prstGeom>
+          <a:noFill/>
+        </p:spPr>
+        <p:txBody>
+          <a:bodyPr wrap="square">
+            <a:spAutoFit/>
+          </a:bodyPr>
+          <a:lstStyle/>
+          <a:p>
+            <a:pPr algn="ctr">
+              <a:defRPr sz="1400" b="1">
+                <a:solidFill>
+                  <a:srgbClr val="FFFFFF"/>
+                </a:solidFill>
+                <a:latin typeface="微软雅黑"/>
+              </a:defRPr>
+            </a:pPr>
+            <a:r>
+              <a:t>机构版发布</a:t>
+            </a:r>
+          </a:p>
+        </p:txBody>
+      </p:sp>
+      <p:sp>
+        <p:nvSpPr>
+          <p:cNvPr id="42" name="Rounded Rectangle 41"/>
+          <p:cNvSpPr/>
+          <p:nvPr/>
+        </p:nvSpPr>
+        <p:spPr>
+          <a:xfrm>
+            <a:off x="5623560" y="2971800"/>
+            <a:ext cx="960120" cy="274320"/>
+          </a:xfrm>
+          <a:prstGeom prst="roundRect">
+            <a:avLst>
+              <a:gd name="adj" fmla="val 5000"/>
+            </a:avLst>
+          </a:prstGeom>
+          <a:solidFill>
+            <a:srgbClr val="1E3A5F"/>
+          </a:solidFill>
+          <a:ln w="12700">
+            <a:solidFill>
+              <a:srgbClr val="3B82F6"/>
+            </a:solidFill>
+          </a:ln>
+        </p:spPr>
+        <p:style>
+          <a:lnRef idx="1">
+            <a:schemeClr val="accent1"/>
+          </a:lnRef>
+          <a:fillRef idx="3">
+            <a:schemeClr val="accent1"/>
+          </a:fillRef>
+          <a:effectRef idx="2">
+            <a:schemeClr val="accent1"/>
+          </a:effectRef>
+          <a:fontRef idx="minor">
+            <a:schemeClr val="lt1"/>
+          </a:fontRef>
+        </p:style>
+        <p:txBody>
+          <a:bodyPr rtlCol="0" anchor="ctr"/>
+          <a:lstStyle/>
+          <a:p>
+            <a:pPr algn="ctr"/>
+          </a:p>
+        </p:txBody>
+      </p:sp>
+      <p:sp>
+        <p:nvSpPr>
           <p:cNvPr id="43" name="TextBox 42"/>
           <p:cNvSpPr txBox="1"/>
           <p:nvPr/>
         </p:nvSpPr>
         <p:spPr>
           <a:xfrm>
-            <a:off x="6675120" y="4983480"/>
-            <a:ext cx="4572000" cy="365760"/>
+            <a:off x="5623560" y="2971800"/>
+            <a:ext cx="960120" cy="274320"/>
+          </a:xfrm>
+          <a:prstGeom prst="rect">
+            <a:avLst/>
+          </a:prstGeom>
+          <a:noFill/>
+        </p:spPr>
+        <p:txBody>
+          <a:bodyPr wrap="square">
+            <a:spAutoFit/>
+          </a:bodyPr>
+          <a:lstStyle/>
+          <a:p>
+            <a:pPr algn="ctr">
+              <a:defRPr sz="900" b="1">
+                <a:solidFill>
+                  <a:srgbClr val="3B82F6"/>
+                </a:solidFill>
+                <a:latin typeface="微软雅黑"/>
+              </a:defRPr>
+            </a:pPr>
+            <a:r>
+              <a:t>10-20家付费</a:t>
+            </a:r>
+          </a:p>
+        </p:txBody>
+      </p:sp>
+      <p:sp>
+        <p:nvSpPr>
+          <p:cNvPr id="44" name="TextBox 43"/>
+          <p:cNvSpPr txBox="1"/>
+          <p:nvPr/>
+        </p:nvSpPr>
+        <p:spPr>
+          <a:xfrm>
+            <a:off x="5577840" y="3383280"/>
+            <a:ext cx="1097280" cy="228600"/>
+          </a:xfrm>
+          <a:prstGeom prst="rect">
+            <a:avLst/>
+          </a:prstGeom>
+          <a:noFill/>
+        </p:spPr>
+        <p:txBody>
+          <a:bodyPr wrap="square">
+            <a:spAutoFit/>
+          </a:bodyPr>
+          <a:lstStyle/>
+          <a:p>
+            <a:pPr algn="l">
+              <a:defRPr sz="900" b="0">
+                <a:solidFill>
+                  <a:srgbClr val="94A3B8"/>
+                </a:solidFill>
+                <a:latin typeface="微软雅黑"/>
+              </a:defRPr>
+            </a:pPr>
+            <a:r>
+              <a:t>• 机构版功能完善</a:t>
+            </a:r>
+          </a:p>
+        </p:txBody>
+      </p:sp>
+      <p:sp>
+        <p:nvSpPr>
+          <p:cNvPr id="45" name="TextBox 44"/>
+          <p:cNvSpPr txBox="1"/>
+          <p:nvPr/>
+        </p:nvSpPr>
+        <p:spPr>
+          <a:xfrm>
+            <a:off x="5577840" y="3611880"/>
+            <a:ext cx="1097280" cy="228600"/>
+          </a:xfrm>
+          <a:prstGeom prst="rect">
+            <a:avLst/>
+          </a:prstGeom>
+          <a:noFill/>
+        </p:spPr>
+        <p:txBody>
+          <a:bodyPr wrap="square">
+            <a:spAutoFit/>
+          </a:bodyPr>
+          <a:lstStyle/>
+          <a:p>
+            <a:pPr algn="l">
+              <a:defRPr sz="900" b="0">
+                <a:solidFill>
+                  <a:srgbClr val="94A3B8"/>
+                </a:solidFill>
+                <a:latin typeface="微软雅黑"/>
+              </a:defRPr>
+            </a:pPr>
+            <a:r>
+              <a:t>• 合规模块上线</a:t>
+            </a:r>
+          </a:p>
+        </p:txBody>
+      </p:sp>
+      <p:sp>
+        <p:nvSpPr>
+          <p:cNvPr id="46" name="TextBox 45"/>
+          <p:cNvSpPr txBox="1"/>
+          <p:nvPr/>
+        </p:nvSpPr>
+        <p:spPr>
+          <a:xfrm>
+            <a:off x="5577840" y="3840480"/>
+            <a:ext cx="1097280" cy="228600"/>
+          </a:xfrm>
+          <a:prstGeom prst="rect">
+            <a:avLst/>
+          </a:prstGeom>
+          <a:noFill/>
+        </p:spPr>
+        <p:txBody>
+          <a:bodyPr wrap="square">
+            <a:spAutoFit/>
+          </a:bodyPr>
+          <a:lstStyle/>
+          <a:p>
+            <a:pPr algn="l">
+              <a:defRPr sz="900" b="0">
+                <a:solidFill>
+                  <a:srgbClr val="94A3B8"/>
+                </a:solidFill>
+                <a:latin typeface="微软雅黑"/>
+              </a:defRPr>
+            </a:pPr>
+            <a:r>
+              <a:t>• 机构客户拓展</a:t>
+            </a:r>
+          </a:p>
+        </p:txBody>
+      </p:sp>
+      <p:sp>
+        <p:nvSpPr>
+          <p:cNvPr id="47" name="TextBox 46"/>
+          <p:cNvSpPr txBox="1"/>
+          <p:nvPr/>
+        </p:nvSpPr>
+        <p:spPr>
+          <a:xfrm>
+            <a:off x="5577840" y="4069080"/>
+            <a:ext cx="1097280" cy="228600"/>
+          </a:xfrm>
+          <a:prstGeom prst="rect">
+            <a:avLst/>
+          </a:prstGeom>
+          <a:noFill/>
+        </p:spPr>
+        <p:txBody>
+          <a:bodyPr wrap="square">
+            <a:spAutoFit/>
+          </a:bodyPr>
+          <a:lstStyle/>
+          <a:p>
+            <a:pPr algn="l">
+              <a:defRPr sz="900" b="0">
+                <a:solidFill>
+                  <a:srgbClr val="94A3B8"/>
+                </a:solidFill>
+                <a:latin typeface="微软雅黑"/>
+              </a:defRPr>
+            </a:pPr>
+            <a:r>
+              <a:t>• 品牌影响力建立</a:t>
+            </a:r>
+          </a:p>
+        </p:txBody>
+      </p:sp>
+      <p:sp>
+        <p:nvSpPr>
+          <p:cNvPr id="48" name="TextBox 47"/>
+          <p:cNvSpPr txBox="1"/>
+          <p:nvPr/>
+        </p:nvSpPr>
+        <p:spPr>
+          <a:xfrm>
+            <a:off x="6766560" y="3474720"/>
+            <a:ext cx="457200" cy="365760"/>
+          </a:xfrm>
+          <a:prstGeom prst="rect">
+            <a:avLst/>
+          </a:prstGeom>
+          <a:noFill/>
+        </p:spPr>
+        <p:txBody>
+          <a:bodyPr wrap="square">
+            <a:spAutoFit/>
+          </a:bodyPr>
+          <a:lstStyle/>
+          <a:p>
+            <a:pPr algn="ctr">
+              <a:defRPr sz="2000" b="1">
+                <a:solidFill>
+                  <a:srgbClr val="3B82F6"/>
+                </a:solidFill>
+                <a:latin typeface="微软雅黑"/>
+              </a:defRPr>
+            </a:pPr>
+            <a:r>
+              <a:t>→</a:t>
+            </a:r>
+          </a:p>
+        </p:txBody>
+      </p:sp>
+      <p:sp>
+        <p:nvSpPr>
+          <p:cNvPr id="49" name="Rounded Rectangle 48"/>
+          <p:cNvSpPr/>
+          <p:nvPr/>
+        </p:nvSpPr>
+        <p:spPr>
+          <a:xfrm>
+            <a:off x="6949440" y="2468880"/>
+            <a:ext cx="1325880" cy="3017520"/>
+          </a:xfrm>
+          <a:prstGeom prst="roundRect">
+            <a:avLst>
+              <a:gd name="adj" fmla="val 5000"/>
+            </a:avLst>
+          </a:prstGeom>
+          <a:solidFill>
+            <a:srgbClr val="1E293B"/>
+          </a:solidFill>
+          <a:ln w="12700">
+            <a:solidFill>
+              <a:srgbClr val="334455"/>
+            </a:solidFill>
+          </a:ln>
+        </p:spPr>
+        <p:style>
+          <a:lnRef idx="1">
+            <a:schemeClr val="accent1"/>
+          </a:lnRef>
+          <a:fillRef idx="3">
+            <a:schemeClr val="accent1"/>
+          </a:fillRef>
+          <a:effectRef idx="2">
+            <a:schemeClr val="accent1"/>
+          </a:effectRef>
+          <a:fontRef idx="minor">
+            <a:schemeClr val="lt1"/>
+          </a:fontRef>
+        </p:style>
+        <p:txBody>
+          <a:bodyPr rtlCol="0" anchor="ctr"/>
+          <a:lstStyle/>
+          <a:p>
+            <a:pPr algn="ctr"/>
+          </a:p>
+        </p:txBody>
+      </p:sp>
+      <p:sp>
+        <p:nvSpPr>
+          <p:cNvPr id="50" name="Rectangle 49"/>
+          <p:cNvSpPr/>
+          <p:nvPr/>
+        </p:nvSpPr>
+        <p:spPr>
+          <a:xfrm>
+            <a:off x="6949440" y="2468880"/>
+            <a:ext cx="1325880" cy="36576"/>
+          </a:xfrm>
+          <a:prstGeom prst="rect">
+            <a:avLst/>
+          </a:prstGeom>
+          <a:solidFill>
+            <a:srgbClr val="3B82F6"/>
+          </a:solidFill>
+          <a:ln>
+            <a:noFill/>
+          </a:ln>
+        </p:spPr>
+        <p:style>
+          <a:lnRef idx="1">
+            <a:schemeClr val="accent1"/>
+          </a:lnRef>
+          <a:fillRef idx="3">
+            <a:schemeClr val="accent1"/>
+          </a:fillRef>
+          <a:effectRef idx="2">
+            <a:schemeClr val="accent1"/>
+          </a:effectRef>
+          <a:fontRef idx="minor">
+            <a:schemeClr val="lt1"/>
+          </a:fontRef>
+        </p:style>
+        <p:txBody>
+          <a:bodyPr rtlCol="0" anchor="ctr"/>
+          <a:lstStyle/>
+          <a:p>
+            <a:pPr algn="ctr"/>
+          </a:p>
+        </p:txBody>
+      </p:sp>
+      <p:sp>
+        <p:nvSpPr>
+          <p:cNvPr id="51" name="TextBox 50"/>
+          <p:cNvSpPr txBox="1"/>
+          <p:nvPr/>
+        </p:nvSpPr>
+        <p:spPr>
+          <a:xfrm>
+            <a:off x="7040880" y="2606040"/>
+            <a:ext cx="1143000" cy="320040"/>
+          </a:xfrm>
+          <a:prstGeom prst="rect">
+            <a:avLst/>
+          </a:prstGeom>
+          <a:noFill/>
+        </p:spPr>
+        <p:txBody>
+          <a:bodyPr wrap="square">
+            <a:spAutoFit/>
+          </a:bodyPr>
+          <a:lstStyle/>
+          <a:p>
+            <a:pPr algn="ctr">
+              <a:defRPr sz="1400" b="1">
+                <a:solidFill>
+                  <a:srgbClr val="FFFFFF"/>
+                </a:solidFill>
+                <a:latin typeface="微软雅黑"/>
+              </a:defRPr>
+            </a:pPr>
+            <a:r>
+              <a:t>企业版发布</a:t>
+            </a:r>
+          </a:p>
+        </p:txBody>
+      </p:sp>
+      <p:sp>
+        <p:nvSpPr>
+          <p:cNvPr id="52" name="Rounded Rectangle 51"/>
+          <p:cNvSpPr/>
+          <p:nvPr/>
+        </p:nvSpPr>
+        <p:spPr>
+          <a:xfrm>
+            <a:off x="7132320" y="2971800"/>
+            <a:ext cx="960120" cy="274320"/>
+          </a:xfrm>
+          <a:prstGeom prst="roundRect">
+            <a:avLst>
+              <a:gd name="adj" fmla="val 5000"/>
+            </a:avLst>
+          </a:prstGeom>
+          <a:solidFill>
+            <a:srgbClr val="1E3A5F"/>
+          </a:solidFill>
+          <a:ln w="12700">
+            <a:solidFill>
+              <a:srgbClr val="3B82F6"/>
+            </a:solidFill>
+          </a:ln>
+        </p:spPr>
+        <p:style>
+          <a:lnRef idx="1">
+            <a:schemeClr val="accent1"/>
+          </a:lnRef>
+          <a:fillRef idx="3">
+            <a:schemeClr val="accent1"/>
+          </a:fillRef>
+          <a:effectRef idx="2">
+            <a:schemeClr val="accent1"/>
+          </a:effectRef>
+          <a:fontRef idx="minor">
+            <a:schemeClr val="lt1"/>
+          </a:fontRef>
+        </p:style>
+        <p:txBody>
+          <a:bodyPr rtlCol="0" anchor="ctr"/>
+          <a:lstStyle/>
+          <a:p>
+            <a:pPr algn="ctr"/>
+          </a:p>
+        </p:txBody>
+      </p:sp>
+      <p:sp>
+        <p:nvSpPr>
+          <p:cNvPr id="53" name="TextBox 52"/>
+          <p:cNvSpPr txBox="1"/>
+          <p:nvPr/>
+        </p:nvSpPr>
+        <p:spPr>
+          <a:xfrm>
+            <a:off x="7132320" y="2971800"/>
+            <a:ext cx="960120" cy="274320"/>
+          </a:xfrm>
+          <a:prstGeom prst="rect">
+            <a:avLst/>
+          </a:prstGeom>
+          <a:noFill/>
+        </p:spPr>
+        <p:txBody>
+          <a:bodyPr wrap="square">
+            <a:spAutoFit/>
+          </a:bodyPr>
+          <a:lstStyle/>
+          <a:p>
+            <a:pPr algn="ctr">
+              <a:defRPr sz="900" b="1">
+                <a:solidFill>
+                  <a:srgbClr val="3B82F6"/>
+                </a:solidFill>
+                <a:latin typeface="微软雅黑"/>
+              </a:defRPr>
+            </a:pPr>
+            <a:r>
+              <a:t>3-5家大客户</a:t>
+            </a:r>
+          </a:p>
+        </p:txBody>
+      </p:sp>
+      <p:sp>
+        <p:nvSpPr>
+          <p:cNvPr id="54" name="TextBox 53"/>
+          <p:cNvSpPr txBox="1"/>
+          <p:nvPr/>
+        </p:nvSpPr>
+        <p:spPr>
+          <a:xfrm>
+            <a:off x="7086600" y="3383280"/>
+            <a:ext cx="1097280" cy="228600"/>
+          </a:xfrm>
+          <a:prstGeom prst="rect">
+            <a:avLst/>
+          </a:prstGeom>
+          <a:noFill/>
+        </p:spPr>
+        <p:txBody>
+          <a:bodyPr wrap="square">
+            <a:spAutoFit/>
+          </a:bodyPr>
+          <a:lstStyle/>
+          <a:p>
+            <a:pPr algn="l">
+              <a:defRPr sz="900" b="0">
+                <a:solidFill>
+                  <a:srgbClr val="94A3B8"/>
+                </a:solidFill>
+                <a:latin typeface="微软雅黑"/>
+              </a:defRPr>
+            </a:pPr>
+            <a:r>
+              <a:t>• 企业版私有部署</a:t>
+            </a:r>
+          </a:p>
+        </p:txBody>
+      </p:sp>
+      <p:sp>
+        <p:nvSpPr>
+          <p:cNvPr id="55" name="TextBox 54"/>
+          <p:cNvSpPr txBox="1"/>
+          <p:nvPr/>
+        </p:nvSpPr>
+        <p:spPr>
+          <a:xfrm>
+            <a:off x="7086600" y="3611880"/>
+            <a:ext cx="1097280" cy="228600"/>
+          </a:xfrm>
+          <a:prstGeom prst="rect">
+            <a:avLst/>
+          </a:prstGeom>
+          <a:noFill/>
+        </p:spPr>
+        <p:txBody>
+          <a:bodyPr wrap="square">
+            <a:spAutoFit/>
+          </a:bodyPr>
+          <a:lstStyle/>
+          <a:p>
+            <a:pPr algn="l">
+              <a:defRPr sz="900" b="0">
+                <a:solidFill>
+                  <a:srgbClr val="94A3B8"/>
+                </a:solidFill>
+                <a:latin typeface="微软雅黑"/>
+              </a:defRPr>
+            </a:pPr>
+            <a:r>
+              <a:t>• 大客户签约</a:t>
+            </a:r>
+          </a:p>
+        </p:txBody>
+      </p:sp>
+      <p:sp>
+        <p:nvSpPr>
+          <p:cNvPr id="56" name="TextBox 55"/>
+          <p:cNvSpPr txBox="1"/>
+          <p:nvPr/>
+        </p:nvSpPr>
+        <p:spPr>
+          <a:xfrm>
+            <a:off x="7086600" y="3840480"/>
+            <a:ext cx="1097280" cy="228600"/>
+          </a:xfrm>
+          <a:prstGeom prst="rect">
+            <a:avLst/>
+          </a:prstGeom>
+          <a:noFill/>
+        </p:spPr>
+        <p:txBody>
+          <a:bodyPr wrap="square">
+            <a:spAutoFit/>
+          </a:bodyPr>
+          <a:lstStyle/>
+          <a:p>
+            <a:pPr algn="l">
+              <a:defRPr sz="900" b="0">
+                <a:solidFill>
+                  <a:srgbClr val="94A3B8"/>
+                </a:solidFill>
+                <a:latin typeface="微软雅黑"/>
+              </a:defRPr>
+            </a:pPr>
+            <a:r>
+              <a:t>• 营收突破5000万</a:t>
+            </a:r>
+          </a:p>
+        </p:txBody>
+      </p:sp>
+      <p:sp>
+        <p:nvSpPr>
+          <p:cNvPr id="57" name="TextBox 56"/>
+          <p:cNvSpPr txBox="1"/>
+          <p:nvPr/>
+        </p:nvSpPr>
+        <p:spPr>
+          <a:xfrm>
+            <a:off x="7086600" y="4069080"/>
+            <a:ext cx="1097280" cy="228600"/>
+          </a:xfrm>
+          <a:prstGeom prst="rect">
+            <a:avLst/>
+          </a:prstGeom>
+          <a:noFill/>
+        </p:spPr>
+        <p:txBody>
+          <a:bodyPr wrap="square">
+            <a:spAutoFit/>
+          </a:bodyPr>
+          <a:lstStyle/>
+          <a:p>
+            <a:pPr algn="l">
+              <a:defRPr sz="900" b="0">
+                <a:solidFill>
+                  <a:srgbClr val="94A3B8"/>
+                </a:solidFill>
+                <a:latin typeface="微软雅黑"/>
+              </a:defRPr>
+            </a:pPr>
+            <a:r>
+              <a:t>• 行业标杆打造</a:t>
+            </a:r>
+          </a:p>
+        </p:txBody>
+      </p:sp>
+      <p:sp>
+        <p:nvSpPr>
+          <p:cNvPr id="58" name="TextBox 57"/>
+          <p:cNvSpPr txBox="1"/>
+          <p:nvPr/>
+        </p:nvSpPr>
+        <p:spPr>
+          <a:xfrm>
+            <a:off x="8503920" y="1463040"/>
+            <a:ext cx="3017520" cy="365760"/>
           </a:xfrm>
           <a:prstGeom prst="rect">
             <a:avLst/>
@@ -5306,27 +5845,466 @@
             <a:pPr algn="l">
               <a:defRPr sz="1600" b="1">
                 <a:solidFill>
+                  <a:srgbClr val="FFFFFF"/>
+                </a:solidFill>
+                <a:latin typeface="微软雅黑"/>
+              </a:defRPr>
+            </a:pPr>
+            <a:r>
+              <a:t>💰 融资需求</a:t>
+            </a:r>
+          </a:p>
+        </p:txBody>
+      </p:sp>
+      <p:sp>
+        <p:nvSpPr>
+          <p:cNvPr id="59" name="Rounded Rectangle 58"/>
+          <p:cNvSpPr/>
+          <p:nvPr/>
+        </p:nvSpPr>
+        <p:spPr>
+          <a:xfrm>
+            <a:off x="8503920" y="2011680"/>
+            <a:ext cx="2926080" cy="1828800"/>
+          </a:xfrm>
+          <a:prstGeom prst="roundRect">
+            <a:avLst>
+              <a:gd name="adj" fmla="val 5000"/>
+            </a:avLst>
+          </a:prstGeom>
+          <a:solidFill>
+            <a:srgbClr val="1E293B"/>
+          </a:solidFill>
+          <a:ln w="19050">
+            <a:solidFill>
+              <a:srgbClr val="334455"/>
+            </a:solidFill>
+          </a:ln>
+        </p:spPr>
+        <p:style>
+          <a:lnRef idx="1">
+            <a:schemeClr val="accent1"/>
+          </a:lnRef>
+          <a:fillRef idx="3">
+            <a:schemeClr val="accent1"/>
+          </a:fillRef>
+          <a:effectRef idx="2">
+            <a:schemeClr val="accent1"/>
+          </a:effectRef>
+          <a:fontRef idx="minor">
+            <a:schemeClr val="lt1"/>
+          </a:fontRef>
+        </p:style>
+        <p:txBody>
+          <a:bodyPr rtlCol="0" anchor="ctr"/>
+          <a:lstStyle/>
+          <a:p>
+            <a:pPr algn="ctr"/>
+          </a:p>
+        </p:txBody>
+      </p:sp>
+      <p:sp>
+        <p:nvSpPr>
+          <p:cNvPr id="60" name="Rectangle 59"/>
+          <p:cNvSpPr/>
+          <p:nvPr/>
+        </p:nvSpPr>
+        <p:spPr>
+          <a:xfrm>
+            <a:off x="8503920" y="2011680"/>
+            <a:ext cx="2926080" cy="36576"/>
+          </a:xfrm>
+          <a:prstGeom prst="rect">
+            <a:avLst/>
+          </a:prstGeom>
+          <a:solidFill>
+            <a:srgbClr val="F59E0B"/>
+          </a:solidFill>
+          <a:ln>
+            <a:noFill/>
+          </a:ln>
+        </p:spPr>
+        <p:style>
+          <a:lnRef idx="1">
+            <a:schemeClr val="accent1"/>
+          </a:lnRef>
+          <a:fillRef idx="3">
+            <a:schemeClr val="accent1"/>
+          </a:fillRef>
+          <a:effectRef idx="2">
+            <a:schemeClr val="accent1"/>
+          </a:effectRef>
+          <a:fontRef idx="minor">
+            <a:schemeClr val="lt1"/>
+          </a:fontRef>
+        </p:style>
+        <p:txBody>
+          <a:bodyPr rtlCol="0" anchor="ctr"/>
+          <a:lstStyle/>
+          <a:p>
+            <a:pPr algn="ctr"/>
+          </a:p>
+        </p:txBody>
+      </p:sp>
+      <p:sp>
+        <p:nvSpPr>
+          <p:cNvPr id="61" name="TextBox 60"/>
+          <p:cNvSpPr txBox="1"/>
+          <p:nvPr/>
+        </p:nvSpPr>
+        <p:spPr>
+          <a:xfrm>
+            <a:off x="8686800" y="2148840"/>
+            <a:ext cx="2560320" cy="274320"/>
+          </a:xfrm>
+          <a:prstGeom prst="rect">
+            <a:avLst/>
+          </a:prstGeom>
+          <a:noFill/>
+        </p:spPr>
+        <p:txBody>
+          <a:bodyPr wrap="square">
+            <a:spAutoFit/>
+          </a:bodyPr>
+          <a:lstStyle/>
+          <a:p>
+            <a:pPr algn="l">
+              <a:defRPr sz="1300" b="1">
+                <a:solidFill>
+                  <a:srgbClr val="F59E0B"/>
+                </a:solidFill>
+                <a:latin typeface="微软雅黑"/>
+              </a:defRPr>
+            </a:pPr>
+            <a:r>
+              <a:t>天使轮</a:t>
+            </a:r>
+          </a:p>
+        </p:txBody>
+      </p:sp>
+      <p:sp>
+        <p:nvSpPr>
+          <p:cNvPr id="62" name="TextBox 61"/>
+          <p:cNvSpPr txBox="1"/>
+          <p:nvPr/>
+        </p:nvSpPr>
+        <p:spPr>
+          <a:xfrm>
+            <a:off x="8686800" y="2423160"/>
+            <a:ext cx="2560320" cy="457200"/>
+          </a:xfrm>
+          <a:prstGeom prst="rect">
+            <a:avLst/>
+          </a:prstGeom>
+          <a:noFill/>
+        </p:spPr>
+        <p:txBody>
+          <a:bodyPr wrap="square">
+            <a:spAutoFit/>
+          </a:bodyPr>
+          <a:lstStyle/>
+          <a:p>
+            <a:pPr algn="l">
+              <a:defRPr sz="2800" b="1">
+                <a:solidFill>
+                  <a:srgbClr val="FFFFFF"/>
+                </a:solidFill>
+                <a:latin typeface="微软雅黑"/>
+              </a:defRPr>
+            </a:pPr>
+            <a:r>
+              <a:t>500万</a:t>
+            </a:r>
+          </a:p>
+        </p:txBody>
+      </p:sp>
+      <p:sp>
+        <p:nvSpPr>
+          <p:cNvPr id="63" name="Rectangle 62"/>
+          <p:cNvSpPr/>
+          <p:nvPr/>
+        </p:nvSpPr>
+        <p:spPr>
+          <a:xfrm>
+            <a:off x="8686800" y="2926080"/>
+            <a:ext cx="2560320" cy="13716"/>
+          </a:xfrm>
+          <a:prstGeom prst="rect">
+            <a:avLst/>
+          </a:prstGeom>
+          <a:solidFill>
+            <a:srgbClr val="334455"/>
+          </a:solidFill>
+          <a:ln>
+            <a:noFill/>
+          </a:ln>
+        </p:spPr>
+        <p:style>
+          <a:lnRef idx="1">
+            <a:schemeClr val="accent1"/>
+          </a:lnRef>
+          <a:fillRef idx="3">
+            <a:schemeClr val="accent1"/>
+          </a:fillRef>
+          <a:effectRef idx="2">
+            <a:schemeClr val="accent1"/>
+          </a:effectRef>
+          <a:fontRef idx="minor">
+            <a:schemeClr val="lt1"/>
+          </a:fontRef>
+        </p:style>
+        <p:txBody>
+          <a:bodyPr rtlCol="0" anchor="ctr"/>
+          <a:lstStyle/>
+          <a:p>
+            <a:pPr algn="ctr"/>
+          </a:p>
+        </p:txBody>
+      </p:sp>
+      <p:sp>
+        <p:nvSpPr>
+          <p:cNvPr id="64" name="TextBox 63"/>
+          <p:cNvSpPr txBox="1"/>
+          <p:nvPr/>
+        </p:nvSpPr>
+        <p:spPr>
+          <a:xfrm>
+            <a:off x="8686800" y="3017520"/>
+            <a:ext cx="2560320" cy="228600"/>
+          </a:xfrm>
+          <a:prstGeom prst="rect">
+            <a:avLst/>
+          </a:prstGeom>
+          <a:noFill/>
+        </p:spPr>
+        <p:txBody>
+          <a:bodyPr wrap="square">
+            <a:spAutoFit/>
+          </a:bodyPr>
+          <a:lstStyle/>
+          <a:p>
+            <a:pPr algn="l">
+              <a:defRPr sz="1000" b="0">
+                <a:solidFill>
+                  <a:srgbClr val="94A3B8"/>
+                </a:solidFill>
+                <a:latin typeface="微软雅黑"/>
+              </a:defRPr>
+            </a:pPr>
+            <a:r>
+              <a:t>MVP开发 + 种子用户获取</a:t>
+            </a:r>
+          </a:p>
+        </p:txBody>
+      </p:sp>
+      <p:sp>
+        <p:nvSpPr>
+          <p:cNvPr id="65" name="TextBox 64"/>
+          <p:cNvSpPr txBox="1"/>
+          <p:nvPr/>
+        </p:nvSpPr>
+        <p:spPr>
+          <a:xfrm>
+            <a:off x="8686800" y="3246120"/>
+            <a:ext cx="2560320" cy="228600"/>
+          </a:xfrm>
+          <a:prstGeom prst="rect">
+            <a:avLst/>
+          </a:prstGeom>
+          <a:noFill/>
+        </p:spPr>
+        <p:txBody>
+          <a:bodyPr wrap="square">
+            <a:spAutoFit/>
+          </a:bodyPr>
+          <a:lstStyle/>
+          <a:p>
+            <a:pPr algn="l">
+              <a:defRPr sz="1000" b="0">
+                <a:solidFill>
+                  <a:srgbClr val="94A3B8"/>
+                </a:solidFill>
+                <a:latin typeface="微软雅黑"/>
+              </a:defRPr>
+            </a:pPr>
+            <a:r>
+              <a:t>核心智能体研发投入</a:t>
+            </a:r>
+          </a:p>
+        </p:txBody>
+      </p:sp>
+      <p:sp>
+        <p:nvSpPr>
+          <p:cNvPr id="66" name="TextBox 65"/>
+          <p:cNvSpPr txBox="1"/>
+          <p:nvPr/>
+        </p:nvSpPr>
+        <p:spPr>
+          <a:xfrm>
+            <a:off x="8686800" y="3474720"/>
+            <a:ext cx="2560320" cy="228600"/>
+          </a:xfrm>
+          <a:prstGeom prst="rect">
+            <a:avLst/>
+          </a:prstGeom>
+          <a:noFill/>
+        </p:spPr>
+        <p:txBody>
+          <a:bodyPr wrap="square">
+            <a:spAutoFit/>
+          </a:bodyPr>
+          <a:lstStyle/>
+          <a:p>
+            <a:pPr algn="l">
+              <a:defRPr sz="1000" b="0">
+                <a:solidFill>
+                  <a:srgbClr val="94A3B8"/>
+                </a:solidFill>
+                <a:latin typeface="微软雅黑"/>
+              </a:defRPr>
+            </a:pPr>
+            <a:r>
+              <a:t>产品验证与快速迭代</a:t>
+            </a:r>
+          </a:p>
+        </p:txBody>
+      </p:sp>
+      <p:sp>
+        <p:nvSpPr>
+          <p:cNvPr id="67" name="Rounded Rectangle 66"/>
+          <p:cNvSpPr/>
+          <p:nvPr/>
+        </p:nvSpPr>
+        <p:spPr>
+          <a:xfrm>
+            <a:off x="8503920" y="4023360"/>
+            <a:ext cx="2926080" cy="1828800"/>
+          </a:xfrm>
+          <a:prstGeom prst="roundRect">
+            <a:avLst>
+              <a:gd name="adj" fmla="val 5000"/>
+            </a:avLst>
+          </a:prstGeom>
+          <a:solidFill>
+            <a:srgbClr val="1E293B"/>
+          </a:solidFill>
+          <a:ln w="19050">
+            <a:solidFill>
+              <a:srgbClr val="334455"/>
+            </a:solidFill>
+          </a:ln>
+        </p:spPr>
+        <p:style>
+          <a:lnRef idx="1">
+            <a:schemeClr val="accent1"/>
+          </a:lnRef>
+          <a:fillRef idx="3">
+            <a:schemeClr val="accent1"/>
+          </a:fillRef>
+          <a:effectRef idx="2">
+            <a:schemeClr val="accent1"/>
+          </a:effectRef>
+          <a:fontRef idx="minor">
+            <a:schemeClr val="lt1"/>
+          </a:fontRef>
+        </p:style>
+        <p:txBody>
+          <a:bodyPr rtlCol="0" anchor="ctr"/>
+          <a:lstStyle/>
+          <a:p>
+            <a:pPr algn="ctr"/>
+          </a:p>
+        </p:txBody>
+      </p:sp>
+      <p:sp>
+        <p:nvSpPr>
+          <p:cNvPr id="68" name="Rectangle 67"/>
+          <p:cNvSpPr/>
+          <p:nvPr/>
+        </p:nvSpPr>
+        <p:spPr>
+          <a:xfrm>
+            <a:off x="8503920" y="4023360"/>
+            <a:ext cx="2926080" cy="36576"/>
+          </a:xfrm>
+          <a:prstGeom prst="rect">
+            <a:avLst/>
+          </a:prstGeom>
+          <a:solidFill>
+            <a:srgbClr val="3B82F6"/>
+          </a:solidFill>
+          <a:ln>
+            <a:noFill/>
+          </a:ln>
+        </p:spPr>
+        <p:style>
+          <a:lnRef idx="1">
+            <a:schemeClr val="accent1"/>
+          </a:lnRef>
+          <a:fillRef idx="3">
+            <a:schemeClr val="accent1"/>
+          </a:fillRef>
+          <a:effectRef idx="2">
+            <a:schemeClr val="accent1"/>
+          </a:effectRef>
+          <a:fontRef idx="minor">
+            <a:schemeClr val="lt1"/>
+          </a:fontRef>
+        </p:style>
+        <p:txBody>
+          <a:bodyPr rtlCol="0" anchor="ctr"/>
+          <a:lstStyle/>
+          <a:p>
+            <a:pPr algn="ctr"/>
+          </a:p>
+        </p:txBody>
+      </p:sp>
+      <p:sp>
+        <p:nvSpPr>
+          <p:cNvPr id="69" name="TextBox 68"/>
+          <p:cNvSpPr txBox="1"/>
+          <p:nvPr/>
+        </p:nvSpPr>
+        <p:spPr>
+          <a:xfrm>
+            <a:off x="8686800" y="4160520"/>
+            <a:ext cx="2560320" cy="274320"/>
+          </a:xfrm>
+          <a:prstGeom prst="rect">
+            <a:avLst/>
+          </a:prstGeom>
+          <a:noFill/>
+        </p:spPr>
+        <p:txBody>
+          <a:bodyPr wrap="square">
+            <a:spAutoFit/>
+          </a:bodyPr>
+          <a:lstStyle/>
+          <a:p>
+            <a:pPr algn="l">
+              <a:defRPr sz="1300" b="1">
+                <a:solidFill>
                   <a:srgbClr val="3B82F6"/>
                 </a:solidFill>
-                <a:latin typeface="Microsoft YaHei"/>
-              </a:defRPr>
-            </a:pPr>
-            <a:r>
-              <a:t>🎯 愿景</a:t>
-            </a:r>
-          </a:p>
-        </p:txBody>
-      </p:sp>
-      <p:sp>
-        <p:nvSpPr>
-          <p:cNvPr id="44" name="TextBox 43"/>
-          <p:cNvSpPr txBox="1"/>
-          <p:nvPr/>
-        </p:nvSpPr>
-        <p:spPr>
-          <a:xfrm>
-            <a:off x="6675120" y="5394960"/>
-            <a:ext cx="4572000" cy="914400"/>
+                <a:latin typeface="微软雅黑"/>
+              </a:defRPr>
+            </a:pPr>
+            <a:r>
+              <a:t>Pre-A轮</a:t>
+            </a:r>
+          </a:p>
+        </p:txBody>
+      </p:sp>
+      <p:sp>
+        <p:nvSpPr>
+          <p:cNvPr id="70" name="TextBox 69"/>
+          <p:cNvSpPr txBox="1"/>
+          <p:nvPr/>
+        </p:nvSpPr>
+        <p:spPr>
+          <a:xfrm>
+            <a:off x="8686800" y="4434840"/>
+            <a:ext cx="2560320" cy="457200"/>
           </a:xfrm>
           <a:prstGeom prst="rect">
             <a:avLst/>
@@ -5340,26 +6318,252 @@
           <a:lstStyle/>
           <a:p>
             <a:pPr algn="l">
-              <a:defRPr sz="1300" b="0">
+              <a:defRPr sz="2800" b="1">
+                <a:solidFill>
+                  <a:srgbClr val="FFFFFF"/>
+                </a:solidFill>
+                <a:latin typeface="微软雅黑"/>
+              </a:defRPr>
+            </a:pPr>
+            <a:r>
+              <a:t>2000万</a:t>
+            </a:r>
+          </a:p>
+        </p:txBody>
+      </p:sp>
+      <p:sp>
+        <p:nvSpPr>
+          <p:cNvPr id="71" name="Rectangle 70"/>
+          <p:cNvSpPr/>
+          <p:nvPr/>
+        </p:nvSpPr>
+        <p:spPr>
+          <a:xfrm>
+            <a:off x="8686800" y="4937760"/>
+            <a:ext cx="2560320" cy="13716"/>
+          </a:xfrm>
+          <a:prstGeom prst="rect">
+            <a:avLst/>
+          </a:prstGeom>
+          <a:solidFill>
+            <a:srgbClr val="334455"/>
+          </a:solidFill>
+          <a:ln>
+            <a:noFill/>
+          </a:ln>
+        </p:spPr>
+        <p:style>
+          <a:lnRef idx="1">
+            <a:schemeClr val="accent1"/>
+          </a:lnRef>
+          <a:fillRef idx="3">
+            <a:schemeClr val="accent1"/>
+          </a:fillRef>
+          <a:effectRef idx="2">
+            <a:schemeClr val="accent1"/>
+          </a:effectRef>
+          <a:fontRef idx="minor">
+            <a:schemeClr val="lt1"/>
+          </a:fontRef>
+        </p:style>
+        <p:txBody>
+          <a:bodyPr rtlCol="0" anchor="ctr"/>
+          <a:lstStyle/>
+          <a:p>
+            <a:pPr algn="ctr"/>
+          </a:p>
+        </p:txBody>
+      </p:sp>
+      <p:sp>
+        <p:nvSpPr>
+          <p:cNvPr id="72" name="TextBox 71"/>
+          <p:cNvSpPr txBox="1"/>
+          <p:nvPr/>
+        </p:nvSpPr>
+        <p:spPr>
+          <a:xfrm>
+            <a:off x="8686800" y="5029200"/>
+            <a:ext cx="2560320" cy="228600"/>
+          </a:xfrm>
+          <a:prstGeom prst="rect">
+            <a:avLst/>
+          </a:prstGeom>
+          <a:noFill/>
+        </p:spPr>
+        <p:txBody>
+          <a:bodyPr wrap="square">
+            <a:spAutoFit/>
+          </a:bodyPr>
+          <a:lstStyle/>
+          <a:p>
+            <a:pPr algn="l">
+              <a:defRPr sz="1000" b="0">
                 <a:solidFill>
                   <a:srgbClr val="94A3B8"/>
                 </a:solidFill>
-                <a:latin typeface="Microsoft YaHei"/>
-              </a:defRPr>
-            </a:pPr>
-            <a:r>
-              <a:t>让每一位金融从业者都拥有AI智能体团队</a:t>
-            </a:r>
-            <a:br/>
-            <a:r>
-              <a:t>从被动响应到主动智能，重新定义金融服务</a:t>
-            </a:r>
-          </a:p>
-        </p:txBody>
-      </p:sp>
-      <p:sp>
-        <p:nvSpPr>
-          <p:cNvPr id="45" name="TextBox 44"/>
+                <a:latin typeface="微软雅黑"/>
+              </a:defRPr>
+            </a:pPr>
+            <a:r>
+              <a:t>机构版开发 + 市场拓展</a:t>
+            </a:r>
+          </a:p>
+        </p:txBody>
+      </p:sp>
+      <p:sp>
+        <p:nvSpPr>
+          <p:cNvPr id="73" name="TextBox 72"/>
+          <p:cNvSpPr txBox="1"/>
+          <p:nvPr/>
+        </p:nvSpPr>
+        <p:spPr>
+          <a:xfrm>
+            <a:off x="8686800" y="5257800"/>
+            <a:ext cx="2560320" cy="228600"/>
+          </a:xfrm>
+          <a:prstGeom prst="rect">
+            <a:avLst/>
+          </a:prstGeom>
+          <a:noFill/>
+        </p:spPr>
+        <p:txBody>
+          <a:bodyPr wrap="square">
+            <a:spAutoFit/>
+          </a:bodyPr>
+          <a:lstStyle/>
+          <a:p>
+            <a:pPr algn="l">
+              <a:defRPr sz="1000" b="0">
+                <a:solidFill>
+                  <a:srgbClr val="94A3B8"/>
+                </a:solidFill>
+                <a:latin typeface="微软雅黑"/>
+              </a:defRPr>
+            </a:pPr>
+            <a:r>
+              <a:t>合规体系建设投入</a:t>
+            </a:r>
+          </a:p>
+        </p:txBody>
+      </p:sp>
+      <p:sp>
+        <p:nvSpPr>
+          <p:cNvPr id="74" name="TextBox 73"/>
+          <p:cNvSpPr txBox="1"/>
+          <p:nvPr/>
+        </p:nvSpPr>
+        <p:spPr>
+          <a:xfrm>
+            <a:off x="8686800" y="5486400"/>
+            <a:ext cx="2560320" cy="228600"/>
+          </a:xfrm>
+          <a:prstGeom prst="rect">
+            <a:avLst/>
+          </a:prstGeom>
+          <a:noFill/>
+        </p:spPr>
+        <p:txBody>
+          <a:bodyPr wrap="square">
+            <a:spAutoFit/>
+          </a:bodyPr>
+          <a:lstStyle/>
+          <a:p>
+            <a:pPr algn="l">
+              <a:defRPr sz="1000" b="0">
+                <a:solidFill>
+                  <a:srgbClr val="94A3B8"/>
+                </a:solidFill>
+                <a:latin typeface="微软雅黑"/>
+              </a:defRPr>
+            </a:pPr>
+            <a:r>
+              <a:t>团队扩展与品牌建设</a:t>
+            </a:r>
+          </a:p>
+        </p:txBody>
+      </p:sp>
+      <p:sp>
+        <p:nvSpPr>
+          <p:cNvPr id="75" name="Rectangle 74"/>
+          <p:cNvSpPr/>
+          <p:nvPr/>
+        </p:nvSpPr>
+        <p:spPr>
+          <a:xfrm>
+            <a:off x="0" y="5806440"/>
+            <a:ext cx="12191695" cy="457200"/>
+          </a:xfrm>
+          <a:prstGeom prst="rect">
+            <a:avLst/>
+          </a:prstGeom>
+          <a:solidFill>
+            <a:srgbClr val="0A101E"/>
+          </a:solidFill>
+          <a:ln>
+            <a:noFill/>
+          </a:ln>
+        </p:spPr>
+        <p:style>
+          <a:lnRef idx="1">
+            <a:schemeClr val="accent1"/>
+          </a:lnRef>
+          <a:fillRef idx="3">
+            <a:schemeClr val="accent1"/>
+          </a:fillRef>
+          <a:effectRef idx="2">
+            <a:schemeClr val="accent1"/>
+          </a:effectRef>
+          <a:fontRef idx="minor">
+            <a:schemeClr val="lt1"/>
+          </a:fontRef>
+        </p:style>
+        <p:txBody>
+          <a:bodyPr rtlCol="0" anchor="ctr"/>
+          <a:lstStyle/>
+          <a:p>
+            <a:pPr algn="ctr"/>
+          </a:p>
+        </p:txBody>
+      </p:sp>
+      <p:sp>
+        <p:nvSpPr>
+          <p:cNvPr id="76" name="TextBox 75"/>
+          <p:cNvSpPr txBox="1"/>
+          <p:nvPr/>
+        </p:nvSpPr>
+        <p:spPr>
+          <a:xfrm>
+            <a:off x="0" y="5806440"/>
+            <a:ext cx="12191695" cy="457200"/>
+          </a:xfrm>
+          <a:prstGeom prst="rect">
+            <a:avLst/>
+          </a:prstGeom>
+          <a:noFill/>
+        </p:spPr>
+        <p:txBody>
+          <a:bodyPr wrap="square">
+            <a:spAutoFit/>
+          </a:bodyPr>
+          <a:lstStyle/>
+          <a:p>
+            <a:pPr algn="ctr">
+              <a:defRPr sz="1800" b="1">
+                <a:solidFill>
+                  <a:srgbClr val="3B82F6"/>
+                </a:solidFill>
+                <a:latin typeface="微软雅黑"/>
+              </a:defRPr>
+            </a:pPr>
+            <a:r>
+              <a:t>一个人，一支队，以一当十</a:t>
+            </a:r>
+          </a:p>
+        </p:txBody>
+      </p:sp>
+      <p:sp>
+        <p:nvSpPr>
+          <p:cNvPr id="77" name="TextBox 76"/>
           <p:cNvSpPr txBox="1"/>
           <p:nvPr/>
         </p:nvSpPr>
@@ -5384,7 +6588,7 @@
                 <a:solidFill>
                   <a:srgbClr val="94A3B8"/>
                 </a:solidFill>
-                <a:latin typeface="Microsoft YaHei"/>
+                <a:latin typeface="微软雅黑"/>
               </a:defRPr>
             </a:pPr>
             <a:r>
